--- a/共享KV调度形式化分析汇总PPT-20260917.pptx
+++ b/共享KV调度形式化分析汇总PPT-20260917.pptx
@@ -1124,7 +1124,7 @@
     <p:bg>
       <p:bgPr>
         <a:solidFill>
-          <a:srgbClr val="0F1D2E"/>
+          <a:srgbClr val="FFFFFF"/>
         </a:solidFill>
       </p:bgPr>
     </p:bg>
@@ -1169,7 +1169,7 @@
             <a:r>
               <a:rPr lang="en-US" sz="1100" b="1" spc="250" kern="0" dirty="0">
                 <a:solidFill>
-                  <a:srgbClr val="6FD6C9"/>
+                  <a:srgbClr val="0F766E"/>
                 </a:solidFill>
               </a:rPr>
               <a:t>共享 KV 调度研究 · 形式化分析摘要</a:t>
@@ -1205,7 +1205,7 @@
             <a:r>
               <a:rPr lang="en-US" sz="2500" b="1" dirty="0">
                 <a:solidFill>
-                  <a:srgbClr val="EDF2F7"/>
+                  <a:srgbClr val="16232F"/>
                 </a:solidFill>
               </a:rPr>
               <a:t>① 统一队列下的批组队与错峰调度：形式化模型</a:t>
@@ -1241,7 +1241,7 @@
             <a:r>
               <a:rPr lang="en-US" sz="1100" dirty="0">
                 <a:solidFill>
-                  <a:srgbClr val="A8BACC"/>
+                  <a:srgbClr val="4A5A69"/>
                 </a:solidFill>
               </a:rPr>
               <a:t>《共享 KV 统一队列下的 Batch 效率与错峰调度形式化分析》2026-09-13 · §2 / §4–§7 · 单位：秒、GB、GB/s</a:t>
@@ -1277,7 +1277,7 @@
             <a:r>
               <a:rPr lang="en-US" sz="1300" b="1" dirty="0">
                 <a:solidFill>
-                  <a:srgbClr val="6FD6C9"/>
+                  <a:srgbClr val="0F766E"/>
                 </a:solidFill>
               </a:rPr>
               <a:t>系统模型</a:t>
@@ -1303,14 +1303,21 @@
             </a:avLst>
           </a:prstGeom>
           <a:solidFill>
-            <a:srgbClr val="18293E"/>
+            <a:srgbClr val="FFFFFF"/>
           </a:solidFill>
           <a:ln w="9525">
             <a:solidFill>
-              <a:srgbClr val="2B4159"/>
+              <a:srgbClr val="D9E2E9"/>
             </a:solidFill>
             <a:prstDash val="solid"/>
           </a:ln>
+          <a:effectLst>
+            <a:outerShdw sx="100000" sy="100000" kx="0" ky="0" algn="bl" rotWithShape="0" blurRad="88900" dist="25400" dir="5400000">
+              <a:srgbClr val="8AA0B4">
+                <a:alpha val="20000"/>
+              </a:srgbClr>
+            </a:outerShdw>
+          </a:effectLst>
         </p:spPr>
       </p:sp>
       <p:sp>
@@ -1340,7 +1347,7 @@
             <a:r>
               <a:rPr lang="en-US" sz="1100" dirty="0">
                 <a:solidFill>
-                  <a:srgbClr val="EDF2F7"/>
+                  <a:srgbClr val="16232F"/>
                 </a:solidFill>
                 <a:latin typeface="PingFang SC" pitchFamily="34" charset="0"/>
                 <a:ea typeface="PingFang SC" pitchFamily="34" charset="-122"/>
@@ -1351,7 +1358,7 @@
             <a:r>
               <a:rPr lang="en-US" sz="1100" i="1" dirty="0">
                 <a:solidFill>
-                  <a:srgbClr val="EDF2F7"/>
+                  <a:srgbClr val="16232F"/>
                 </a:solidFill>
                 <a:latin typeface="Times New Roman" pitchFamily="34" charset="0"/>
                 <a:ea typeface="Times New Roman" pitchFamily="34" charset="-122"/>
@@ -1362,7 +1369,7 @@
             <a:r>
               <a:rPr lang="en-US" sz="1100" i="1" baseline="-40000" dirty="0">
                 <a:solidFill>
-                  <a:srgbClr val="EDF2F7"/>
+                  <a:srgbClr val="16232F"/>
                 </a:solidFill>
                 <a:latin typeface="Times New Roman" pitchFamily="34" charset="0"/>
                 <a:ea typeface="Times New Roman" pitchFamily="34" charset="-122"/>
@@ -1373,7 +1380,7 @@
             <a:r>
               <a:rPr lang="en-US" sz="1100" dirty="0">
                 <a:solidFill>
-                  <a:srgbClr val="EDF2F7"/>
+                  <a:srgbClr val="16232F"/>
                 </a:solidFill>
                 <a:latin typeface="Times New Roman" pitchFamily="34" charset="0"/>
                 <a:ea typeface="Times New Roman" pitchFamily="34" charset="-122"/>
@@ -1384,7 +1391,7 @@
             <a:r>
               <a:rPr lang="en-US" sz="1100" i="1" dirty="0">
                 <a:solidFill>
-                  <a:srgbClr val="EDF2F7"/>
+                  <a:srgbClr val="16232F"/>
                 </a:solidFill>
                 <a:latin typeface="Times New Roman" pitchFamily="34" charset="0"/>
                 <a:ea typeface="Times New Roman" pitchFamily="34" charset="-122"/>
@@ -1395,7 +1402,7 @@
             <a:r>
               <a:rPr lang="en-US" sz="1100" i="1" baseline="-40000" dirty="0">
                 <a:solidFill>
-                  <a:srgbClr val="EDF2F7"/>
+                  <a:srgbClr val="16232F"/>
                 </a:solidFill>
                 <a:latin typeface="Times New Roman" pitchFamily="34" charset="0"/>
                 <a:ea typeface="Times New Roman" pitchFamily="34" charset="-122"/>
@@ -1406,7 +1413,7 @@
             <a:r>
               <a:rPr lang="en-US" sz="1100" dirty="0">
                 <a:solidFill>
-                  <a:srgbClr val="EDF2F7"/>
+                  <a:srgbClr val="16232F"/>
                 </a:solidFill>
                 <a:latin typeface="PingFang SC" pitchFamily="34" charset="0"/>
                 <a:ea typeface="PingFang SC" pitchFamily="34" charset="-122"/>
@@ -1417,7 +1424,7 @@
             <a:r>
               <a:rPr lang="en-US" sz="1100" i="1" dirty="0">
                 <a:solidFill>
-                  <a:srgbClr val="EDF2F7"/>
+                  <a:srgbClr val="16232F"/>
                 </a:solidFill>
                 <a:latin typeface="Times New Roman" pitchFamily="34" charset="0"/>
                 <a:ea typeface="Times New Roman" pitchFamily="34" charset="-122"/>
@@ -1428,7 +1435,7 @@
             <a:r>
               <a:rPr lang="en-US" sz="1100" i="1" baseline="-40000" dirty="0">
                 <a:solidFill>
-                  <a:srgbClr val="EDF2F7"/>
+                  <a:srgbClr val="16232F"/>
                 </a:solidFill>
                 <a:latin typeface="Times New Roman" pitchFamily="34" charset="0"/>
                 <a:ea typeface="Times New Roman" pitchFamily="34" charset="-122"/>
@@ -1439,7 +1446,7 @@
             <a:r>
               <a:rPr lang="en-US" sz="1100" dirty="0">
                 <a:solidFill>
-                  <a:srgbClr val="EDF2F7"/>
+                  <a:srgbClr val="16232F"/>
                 </a:solidFill>
                 <a:latin typeface="PingFang SC" pitchFamily="34" charset="0"/>
                 <a:ea typeface="PingFang SC" pitchFamily="34" charset="-122"/>
@@ -1450,7 +1457,7 @@
             <a:r>
               <a:rPr lang="en-US" sz="1100" i="1" dirty="0">
                 <a:solidFill>
-                  <a:srgbClr val="EDF2F7"/>
+                  <a:srgbClr val="16232F"/>
                 </a:solidFill>
                 <a:latin typeface="Times New Roman" pitchFamily="34" charset="0"/>
                 <a:ea typeface="Times New Roman" pitchFamily="34" charset="-122"/>
@@ -1461,7 +1468,7 @@
             <a:r>
               <a:rPr lang="en-US" sz="1100" i="1" baseline="-40000" dirty="0">
                 <a:solidFill>
-                  <a:srgbClr val="EDF2F7"/>
+                  <a:srgbClr val="16232F"/>
                 </a:solidFill>
                 <a:latin typeface="Times New Roman" pitchFamily="34" charset="0"/>
                 <a:ea typeface="Times New Roman" pitchFamily="34" charset="-122"/>
@@ -1490,7 +1497,7 @@
           <a:noFill/>
           <a:ln w="17780">
             <a:solidFill>
-              <a:srgbClr val="A8BACC"/>
+              <a:srgbClr val="4A5A69"/>
             </a:solidFill>
             <a:prstDash val="solid"/>
             <a:tailEnd type="triangle"/>
@@ -1514,14 +1521,21 @@
             </a:avLst>
           </a:prstGeom>
           <a:solidFill>
-            <a:srgbClr val="18293E"/>
+            <a:srgbClr val="FFFFFF"/>
           </a:solidFill>
           <a:ln w="9525">
             <a:solidFill>
-              <a:srgbClr val="2B4159"/>
+              <a:srgbClr val="D9E2E9"/>
             </a:solidFill>
             <a:prstDash val="solid"/>
           </a:ln>
+          <a:effectLst>
+            <a:outerShdw sx="100000" sy="100000" kx="0" ky="0" algn="bl" rotWithShape="0" blurRad="88900" dist="25400" dir="5400000">
+              <a:srgbClr val="8AA0B4">
+                <a:alpha val="20000"/>
+              </a:srgbClr>
+            </a:outerShdw>
+          </a:effectLst>
         </p:spPr>
       </p:sp>
       <p:sp>
@@ -1551,7 +1565,7 @@
             <a:r>
               <a:rPr lang="en-US" sz="1100" dirty="0">
                 <a:solidFill>
-                  <a:srgbClr val="EDF2F7"/>
+                  <a:srgbClr val="16232F"/>
                 </a:solidFill>
                 <a:latin typeface="PingFang SC" pitchFamily="34" charset="0"/>
                 <a:ea typeface="PingFang SC" pitchFamily="34" charset="-122"/>
@@ -1562,7 +1576,7 @@
             <a:r>
               <a:rPr lang="en-US" sz="1100" i="1" dirty="0">
                 <a:solidFill>
-                  <a:srgbClr val="EDF2F7"/>
+                  <a:srgbClr val="16232F"/>
                 </a:solidFill>
                 <a:latin typeface="Times New Roman" pitchFamily="34" charset="0"/>
                 <a:ea typeface="Times New Roman" pitchFamily="34" charset="-122"/>
@@ -1573,7 +1587,7 @@
             <a:r>
               <a:rPr lang="en-US" sz="1100" dirty="0">
                 <a:solidFill>
-                  <a:srgbClr val="EDF2F7"/>
+                  <a:srgbClr val="16232F"/>
                 </a:solidFill>
                 <a:latin typeface="Times New Roman" pitchFamily="34" charset="0"/>
                 <a:ea typeface="Times New Roman" pitchFamily="34" charset="-122"/>
@@ -1584,7 +1598,7 @@
             <a:r>
               <a:rPr lang="en-US" sz="1100" dirty="0">
                 <a:solidFill>
-                  <a:srgbClr val="EDF2F7"/>
+                  <a:srgbClr val="16232F"/>
                 </a:solidFill>
                 <a:latin typeface="PingFang SC" pitchFamily="34" charset="0"/>
                 <a:ea typeface="PingFang SC" pitchFamily="34" charset="-122"/>
@@ -1613,7 +1627,7 @@
           <a:noFill/>
           <a:ln w="17780">
             <a:solidFill>
-              <a:srgbClr val="A8BACC"/>
+              <a:srgbClr val="4A5A69"/>
             </a:solidFill>
             <a:prstDash val="solid"/>
             <a:tailEnd type="triangle"/>
@@ -1637,14 +1651,21 @@
             </a:avLst>
           </a:prstGeom>
           <a:solidFill>
-            <a:srgbClr val="18293E"/>
+            <a:srgbClr val="FFFFFF"/>
           </a:solidFill>
           <a:ln w="9525">
             <a:solidFill>
-              <a:srgbClr val="2B4159"/>
+              <a:srgbClr val="D9E2E9"/>
             </a:solidFill>
             <a:prstDash val="solid"/>
           </a:ln>
+          <a:effectLst>
+            <a:outerShdw sx="100000" sy="100000" kx="0" ky="0" algn="bl" rotWithShape="0" blurRad="88900" dist="25400" dir="5400000">
+              <a:srgbClr val="8AA0B4">
+                <a:alpha val="20000"/>
+              </a:srgbClr>
+            </a:outerShdw>
+          </a:effectLst>
         </p:spPr>
       </p:sp>
       <p:sp>
@@ -1674,7 +1695,7 @@
             <a:r>
               <a:rPr lang="en-US" sz="1100" dirty="0">
                 <a:solidFill>
-                  <a:srgbClr val="EDF2F7"/>
+                  <a:srgbClr val="16232F"/>
                 </a:solidFill>
                 <a:latin typeface="PingFang SC" pitchFamily="34" charset="0"/>
                 <a:ea typeface="PingFang SC" pitchFamily="34" charset="-122"/>
@@ -1703,7 +1724,7 @@
           <a:noFill/>
           <a:ln w="17780">
             <a:solidFill>
-              <a:srgbClr val="A8BACC"/>
+              <a:srgbClr val="4A5A69"/>
             </a:solidFill>
             <a:prstDash val="solid"/>
             <a:tailEnd type="triangle"/>
@@ -1727,14 +1748,21 @@
             </a:avLst>
           </a:prstGeom>
           <a:solidFill>
-            <a:srgbClr val="18293E"/>
+            <a:srgbClr val="FFFFFF"/>
           </a:solidFill>
           <a:ln w="9525">
             <a:solidFill>
-              <a:srgbClr val="2B4159"/>
+              <a:srgbClr val="D9E2E9"/>
             </a:solidFill>
             <a:prstDash val="solid"/>
           </a:ln>
+          <a:effectLst>
+            <a:outerShdw sx="100000" sy="100000" kx="0" ky="0" algn="bl" rotWithShape="0" blurRad="88900" dist="25400" dir="5400000">
+              <a:srgbClr val="8AA0B4">
+                <a:alpha val="20000"/>
+              </a:srgbClr>
+            </a:outerShdw>
+          </a:effectLst>
         </p:spPr>
       </p:sp>
       <p:sp>
@@ -1764,7 +1792,7 @@
             <a:r>
               <a:rPr lang="en-US" sz="1100" dirty="0">
                 <a:solidFill>
-                  <a:srgbClr val="EDF2F7"/>
+                  <a:srgbClr val="16232F"/>
                 </a:solidFill>
                 <a:latin typeface="PingFang SC" pitchFamily="34" charset="0"/>
                 <a:ea typeface="PingFang SC" pitchFamily="34" charset="-122"/>
@@ -1793,7 +1821,7 @@
           <a:noFill/>
           <a:ln w="17780">
             <a:solidFill>
-              <a:srgbClr val="A8BACC"/>
+              <a:srgbClr val="4A5A69"/>
             </a:solidFill>
             <a:prstDash val="solid"/>
             <a:tailEnd type="triangle"/>
@@ -1817,14 +1845,21 @@
             </a:avLst>
           </a:prstGeom>
           <a:solidFill>
-            <a:srgbClr val="18293E"/>
+            <a:srgbClr val="FFFFFF"/>
           </a:solidFill>
           <a:ln w="9525">
             <a:solidFill>
-              <a:srgbClr val="2B4159"/>
+              <a:srgbClr val="D9E2E9"/>
             </a:solidFill>
             <a:prstDash val="solid"/>
           </a:ln>
+          <a:effectLst>
+            <a:outerShdw sx="100000" sy="100000" kx="0" ky="0" algn="bl" rotWithShape="0" blurRad="88900" dist="25400" dir="5400000">
+              <a:srgbClr val="8AA0B4">
+                <a:alpha val="20000"/>
+              </a:srgbClr>
+            </a:outerShdw>
+          </a:effectLst>
         </p:spPr>
       </p:sp>
       <p:sp>
@@ -1854,7 +1889,7 @@
             <a:r>
               <a:rPr lang="en-US" sz="1100" dirty="0">
                 <a:solidFill>
-                  <a:srgbClr val="EDF2F7"/>
+                  <a:srgbClr val="16232F"/>
                 </a:solidFill>
                 <a:latin typeface="PingFang SC" pitchFamily="34" charset="0"/>
                 <a:ea typeface="PingFang SC" pitchFamily="34" charset="-122"/>
@@ -1865,7 +1900,7 @@
             <a:r>
               <a:rPr lang="en-US" sz="1100" i="1" dirty="0">
                 <a:solidFill>
-                  <a:srgbClr val="EDF2F7"/>
+                  <a:srgbClr val="16232F"/>
                 </a:solidFill>
                 <a:latin typeface="Times New Roman" pitchFamily="34" charset="0"/>
                 <a:ea typeface="Times New Roman" pitchFamily="34" charset="-122"/>
@@ -1876,7 +1911,7 @@
             <a:r>
               <a:rPr lang="en-US" sz="1100" dirty="0">
                 <a:solidFill>
-                  <a:srgbClr val="EDF2F7"/>
+                  <a:srgbClr val="16232F"/>
                 </a:solidFill>
                 <a:latin typeface="Times New Roman" pitchFamily="34" charset="0"/>
                 <a:ea typeface="Times New Roman" pitchFamily="34" charset="-122"/>
@@ -1887,7 +1922,7 @@
             <a:r>
               <a:rPr lang="en-US" sz="1100" dirty="0">
                 <a:solidFill>
-                  <a:srgbClr val="EDF2F7"/>
+                  <a:srgbClr val="16232F"/>
                 </a:solidFill>
                 <a:latin typeface="PingFang SC" pitchFamily="34" charset="0"/>
                 <a:ea typeface="PingFang SC" pitchFamily="34" charset="-122"/>
@@ -1916,7 +1951,7 @@
           <a:noFill/>
           <a:ln w="17780">
             <a:solidFill>
-              <a:srgbClr val="A8BACC"/>
+              <a:srgbClr val="4A5A69"/>
             </a:solidFill>
             <a:prstDash val="solid"/>
             <a:tailEnd type="triangle"/>
@@ -1940,14 +1975,21 @@
             </a:avLst>
           </a:prstGeom>
           <a:solidFill>
-            <a:srgbClr val="1E3A54"/>
+            <a:srgbClr val="ECF3F2"/>
           </a:solidFill>
-          <a:ln w="12700">
+          <a:ln w="15240">
             <a:solidFill>
-              <a:srgbClr val="E89B2D"/>
+              <a:srgbClr val="D97706"/>
             </a:solidFill>
             <a:prstDash val="solid"/>
           </a:ln>
+          <a:effectLst>
+            <a:outerShdw sx="100000" sy="100000" kx="0" ky="0" algn="bl" rotWithShape="0" blurRad="88900" dist="25400" dir="5400000">
+              <a:srgbClr val="8AA0B4">
+                <a:alpha val="20000"/>
+              </a:srgbClr>
+            </a:outerShdw>
+          </a:effectLst>
         </p:spPr>
       </p:sp>
       <p:sp>
@@ -1977,7 +2019,7 @@
             <a:r>
               <a:rPr lang="en-US" sz="1100" dirty="0">
                 <a:solidFill>
-                  <a:srgbClr val="EDF2F7"/>
+                  <a:srgbClr val="16232F"/>
                 </a:solidFill>
                 <a:latin typeface="PingFang SC" pitchFamily="34" charset="0"/>
                 <a:ea typeface="PingFang SC" pitchFamily="34" charset="-122"/>
@@ -1988,7 +2030,7 @@
             <a:r>
               <a:rPr lang="en-US" sz="1100" i="1" dirty="0">
                 <a:solidFill>
-                  <a:srgbClr val="EDF2F7"/>
+                  <a:srgbClr val="16232F"/>
                 </a:solidFill>
                 <a:latin typeface="Times New Roman" pitchFamily="34" charset="0"/>
                 <a:ea typeface="Times New Roman" pitchFamily="34" charset="-122"/>
@@ -1999,7 +2041,7 @@
             <a:r>
               <a:rPr lang="en-US" sz="1100" i="1" baseline="-40000" dirty="0">
                 <a:solidFill>
-                  <a:srgbClr val="EDF2F7"/>
+                  <a:srgbClr val="16232F"/>
                 </a:solidFill>
                 <a:latin typeface="Times New Roman" pitchFamily="34" charset="0"/>
                 <a:ea typeface="Times New Roman" pitchFamily="34" charset="-122"/>
@@ -2010,7 +2052,7 @@
             <a:r>
               <a:rPr lang="en-US" sz="1100" dirty="0">
                 <a:solidFill>
-                  <a:srgbClr val="EDF2F7"/>
+                  <a:srgbClr val="16232F"/>
                 </a:solidFill>
                 <a:latin typeface="Times New Roman" pitchFamily="34" charset="0"/>
                 <a:ea typeface="Times New Roman" pitchFamily="34" charset="-122"/>
@@ -2021,7 +2063,7 @@
             <a:r>
               <a:rPr lang="en-US" sz="1100" i="1" dirty="0">
                 <a:solidFill>
-                  <a:srgbClr val="EDF2F7"/>
+                  <a:srgbClr val="16232F"/>
                 </a:solidFill>
                 <a:latin typeface="Times New Roman" pitchFamily="34" charset="0"/>
                 <a:ea typeface="Times New Roman" pitchFamily="34" charset="-122"/>
@@ -2032,7 +2074,7 @@
             <a:r>
               <a:rPr lang="en-US" sz="1100" i="1" baseline="-40000" dirty="0">
                 <a:solidFill>
-                  <a:srgbClr val="EDF2F7"/>
+                  <a:srgbClr val="16232F"/>
                 </a:solidFill>
                 <a:latin typeface="Times New Roman" pitchFamily="34" charset="0"/>
                 <a:ea typeface="Times New Roman" pitchFamily="34" charset="-122"/>
@@ -2061,14 +2103,21 @@
             </a:avLst>
           </a:prstGeom>
           <a:solidFill>
-            <a:srgbClr val="18293E"/>
+            <a:srgbClr val="FFFFFF"/>
           </a:solidFill>
           <a:ln w="9525">
             <a:solidFill>
-              <a:srgbClr val="2B4159"/>
+              <a:srgbClr val="D9E2E9"/>
             </a:solidFill>
             <a:prstDash val="solid"/>
           </a:ln>
+          <a:effectLst>
+            <a:outerShdw sx="100000" sy="100000" kx="0" ky="0" algn="bl" rotWithShape="0" blurRad="88900" dist="25400" dir="5400000">
+              <a:srgbClr val="8AA0B4">
+                <a:alpha val="20000"/>
+              </a:srgbClr>
+            </a:outerShdw>
+          </a:effectLst>
         </p:spPr>
       </p:sp>
       <p:sp>
@@ -2098,7 +2147,7 @@
             <a:r>
               <a:rPr lang="en-US" sz="1250" b="1" dirty="0">
                 <a:solidFill>
-                  <a:srgbClr val="6FD6C9"/>
+                  <a:srgbClr val="0F766E"/>
                 </a:solidFill>
               </a:rPr>
               <a:t>存储纪律 ｜ FCFS 按需分配（式 1）</a:t>
@@ -2134,7 +2183,7 @@
             <a:r>
               <a:rPr lang="en-US" sz="1400" i="1" dirty="0">
                 <a:solidFill>
-                  <a:srgbClr val="EDF2F7"/>
+                  <a:srgbClr val="16232F"/>
                 </a:solidFill>
                 <a:latin typeface="Times New Roman" pitchFamily="34" charset="0"/>
                 <a:ea typeface="Times New Roman" pitchFamily="34" charset="-122"/>
@@ -2145,7 +2194,7 @@
             <a:r>
               <a:rPr lang="en-US" sz="1400" i="1" baseline="-40000" dirty="0">
                 <a:solidFill>
-                  <a:srgbClr val="EDF2F7"/>
+                  <a:srgbClr val="16232F"/>
                 </a:solidFill>
                 <a:latin typeface="Times New Roman" pitchFamily="34" charset="0"/>
                 <a:ea typeface="Times New Roman" pitchFamily="34" charset="-122"/>
@@ -2156,7 +2205,7 @@
             <a:r>
               <a:rPr lang="en-US" sz="1400" dirty="0">
                 <a:solidFill>
-                  <a:srgbClr val="EDF2F7"/>
+                  <a:srgbClr val="16232F"/>
                 </a:solidFill>
                 <a:latin typeface="Times New Roman" pitchFamily="34" charset="0"/>
                 <a:ea typeface="Times New Roman" pitchFamily="34" charset="-122"/>
@@ -2167,7 +2216,7 @@
             <a:r>
               <a:rPr lang="en-US" sz="1400" i="1" dirty="0">
                 <a:solidFill>
-                  <a:srgbClr val="EDF2F7"/>
+                  <a:srgbClr val="16232F"/>
                 </a:solidFill>
                 <a:latin typeface="Times New Roman" pitchFamily="34" charset="0"/>
                 <a:ea typeface="Times New Roman" pitchFamily="34" charset="-122"/>
@@ -2178,7 +2227,7 @@
             <a:r>
               <a:rPr lang="en-US" sz="1400" i="1" baseline="-40000" dirty="0">
                 <a:solidFill>
-                  <a:srgbClr val="EDF2F7"/>
+                  <a:srgbClr val="16232F"/>
                 </a:solidFill>
                 <a:latin typeface="Times New Roman" pitchFamily="34" charset="0"/>
                 <a:ea typeface="Times New Roman" pitchFamily="34" charset="-122"/>
@@ -2189,7 +2238,7 @@
             <a:r>
               <a:rPr lang="en-US" sz="1400" dirty="0">
                 <a:solidFill>
-                  <a:srgbClr val="EDF2F7"/>
+                  <a:srgbClr val="16232F"/>
                 </a:solidFill>
                 <a:latin typeface="Times New Roman" pitchFamily="34" charset="0"/>
                 <a:ea typeface="Times New Roman" pitchFamily="34" charset="-122"/>
@@ -2200,7 +2249,7 @@
             <a:r>
               <a:rPr lang="en-US" sz="1400" i="1" dirty="0">
                 <a:solidFill>
-                  <a:srgbClr val="EDF2F7"/>
+                  <a:srgbClr val="16232F"/>
                 </a:solidFill>
                 <a:latin typeface="Times New Roman" pitchFamily="34" charset="0"/>
                 <a:ea typeface="Times New Roman" pitchFamily="34" charset="-122"/>
@@ -2211,7 +2260,7 @@
             <a:r>
               <a:rPr lang="en-US" sz="1400" dirty="0">
                 <a:solidFill>
-                  <a:srgbClr val="EDF2F7"/>
+                  <a:srgbClr val="16232F"/>
                 </a:solidFill>
                 <a:latin typeface="Times New Roman" pitchFamily="34" charset="0"/>
                 <a:ea typeface="Times New Roman" pitchFamily="34" charset="-122"/>
@@ -2222,7 +2271,7 @@
             <a:r>
               <a:rPr lang="en-US" sz="1400" i="1" baseline="-40000" dirty="0">
                 <a:solidFill>
-                  <a:srgbClr val="EDF2F7"/>
+                  <a:srgbClr val="16232F"/>
                 </a:solidFill>
                 <a:latin typeface="Times New Roman" pitchFamily="34" charset="0"/>
                 <a:ea typeface="Times New Roman" pitchFamily="34" charset="-122"/>
@@ -2233,7 +2282,7 @@
             <a:r>
               <a:rPr lang="en-US" sz="1400" dirty="0">
                 <a:solidFill>
-                  <a:srgbClr val="EDF2F7"/>
+                  <a:srgbClr val="16232F"/>
                 </a:solidFill>
                 <a:latin typeface="Times New Roman" pitchFamily="34" charset="0"/>
                 <a:ea typeface="Times New Roman" pitchFamily="34" charset="-122"/>
@@ -2244,7 +2293,7 @@
             <a:r>
               <a:rPr lang="en-US" sz="1400" i="1" dirty="0">
                 <a:solidFill>
-                  <a:srgbClr val="EDF2F7"/>
+                  <a:srgbClr val="16232F"/>
                 </a:solidFill>
                 <a:latin typeface="Times New Roman" pitchFamily="34" charset="0"/>
                 <a:ea typeface="Times New Roman" pitchFamily="34" charset="-122"/>
@@ -2255,7 +2304,7 @@
             <a:r>
               <a:rPr lang="en-US" sz="1400" i="1" baseline="-40000" dirty="0">
                 <a:solidFill>
-                  <a:srgbClr val="EDF2F7"/>
+                  <a:srgbClr val="16232F"/>
                 </a:solidFill>
                 <a:latin typeface="Times New Roman" pitchFamily="34" charset="0"/>
                 <a:ea typeface="Times New Roman" pitchFamily="34" charset="-122"/>
@@ -2266,7 +2315,7 @@
             <a:r>
               <a:rPr lang="en-US" sz="1400" dirty="0">
                 <a:solidFill>
-                  <a:srgbClr val="EDF2F7"/>
+                  <a:srgbClr val="16232F"/>
                 </a:solidFill>
                 <a:latin typeface="Times New Roman" pitchFamily="34" charset="0"/>
                 <a:ea typeface="Times New Roman" pitchFamily="34" charset="-122"/>
@@ -2277,7 +2326,7 @@
             <a:r>
               <a:rPr lang="en-US" sz="1400" i="1" baseline="30000" dirty="0">
                 <a:solidFill>
-                  <a:srgbClr val="EDF2F7"/>
+                  <a:srgbClr val="16232F"/>
                 </a:solidFill>
                 <a:latin typeface="Times New Roman" pitchFamily="34" charset="0"/>
                 <a:ea typeface="Times New Roman" pitchFamily="34" charset="-122"/>
@@ -2288,7 +2337,7 @@
             <a:r>
               <a:rPr lang="en-US" sz="1400" dirty="0">
                 <a:solidFill>
-                  <a:srgbClr val="EDF2F7"/>
+                  <a:srgbClr val="16232F"/>
                 </a:solidFill>
                 <a:latin typeface="Times New Roman" pitchFamily="34" charset="0"/>
                 <a:ea typeface="Times New Roman" pitchFamily="34" charset="-122"/>
@@ -2299,7 +2348,7 @@
             <a:r>
               <a:rPr lang="en-US" sz="1050" dirty="0">
                 <a:solidFill>
-                  <a:srgbClr val="A8BACC"/>
+                  <a:srgbClr val="4A5A69"/>
                 </a:solidFill>
                 <a:latin typeface="PingFang SC" pitchFamily="34" charset="0"/>
                 <a:ea typeface="PingFang SC" pitchFamily="34" charset="-122"/>
@@ -2310,7 +2359,7 @@
             <a:r>
               <a:rPr lang="en-US" sz="1050" dirty="0">
                 <a:solidFill>
-                  <a:srgbClr val="A8BACC"/>
+                  <a:srgbClr val="4A5A69"/>
                 </a:solidFill>
                 <a:latin typeface="Times New Roman" pitchFamily="34" charset="0"/>
                 <a:ea typeface="Times New Roman" pitchFamily="34" charset="-122"/>
@@ -2321,7 +2370,7 @@
             <a:r>
               <a:rPr lang="en-US" sz="1050" i="1" dirty="0">
                 <a:solidFill>
-                  <a:srgbClr val="A8BACC"/>
+                  <a:srgbClr val="4A5A69"/>
                 </a:solidFill>
                 <a:latin typeface="Times New Roman" pitchFamily="34" charset="0"/>
                 <a:ea typeface="Times New Roman" pitchFamily="34" charset="-122"/>
@@ -2332,7 +2381,7 @@
             <a:r>
               <a:rPr lang="en-US" sz="1050" i="1" baseline="-40000" dirty="0">
                 <a:solidFill>
-                  <a:srgbClr val="A8BACC"/>
+                  <a:srgbClr val="4A5A69"/>
                 </a:solidFill>
                 <a:latin typeface="Times New Roman" pitchFamily="34" charset="0"/>
                 <a:ea typeface="Times New Roman" pitchFamily="34" charset="-122"/>
@@ -2343,7 +2392,7 @@
             <a:r>
               <a:rPr lang="en-US" sz="1050" dirty="0">
                 <a:solidFill>
-                  <a:srgbClr val="A8BACC"/>
+                  <a:srgbClr val="4A5A69"/>
                 </a:solidFill>
                 <a:latin typeface="Times New Roman" pitchFamily="34" charset="0"/>
                 <a:ea typeface="Times New Roman" pitchFamily="34" charset="-122"/>
@@ -2354,7 +2403,7 @@
             <a:r>
               <a:rPr lang="en-US" sz="1050" i="1" dirty="0">
                 <a:solidFill>
-                  <a:srgbClr val="A8BACC"/>
+                  <a:srgbClr val="4A5A69"/>
                 </a:solidFill>
                 <a:latin typeface="Times New Roman" pitchFamily="34" charset="0"/>
                 <a:ea typeface="Times New Roman" pitchFamily="34" charset="-122"/>
@@ -2365,7 +2414,7 @@
             <a:r>
               <a:rPr lang="en-US" sz="1050" dirty="0">
                 <a:solidFill>
-                  <a:srgbClr val="A8BACC"/>
+                  <a:srgbClr val="4A5A69"/>
                 </a:solidFill>
                 <a:latin typeface="Times New Roman" pitchFamily="34" charset="0"/>
                 <a:ea typeface="Times New Roman" pitchFamily="34" charset="-122"/>
@@ -2376,7 +2425,7 @@
             <a:r>
               <a:rPr lang="en-US" sz="1050" i="1" dirty="0">
                 <a:solidFill>
-                  <a:srgbClr val="A8BACC"/>
+                  <a:srgbClr val="4A5A69"/>
                 </a:solidFill>
                 <a:latin typeface="Times New Roman" pitchFamily="34" charset="0"/>
                 <a:ea typeface="Times New Roman" pitchFamily="34" charset="-122"/>
@@ -2387,7 +2436,7 @@
             <a:r>
               <a:rPr lang="en-US" sz="1050" i="1" baseline="-40000" dirty="0">
                 <a:solidFill>
-                  <a:srgbClr val="A8BACC"/>
+                  <a:srgbClr val="4A5A69"/>
                 </a:solidFill>
                 <a:latin typeface="Times New Roman" pitchFamily="34" charset="0"/>
                 <a:ea typeface="Times New Roman" pitchFamily="34" charset="-122"/>
@@ -2398,7 +2447,7 @@
             <a:r>
               <a:rPr lang="en-US" sz="1050" dirty="0">
                 <a:solidFill>
-                  <a:srgbClr val="A8BACC"/>
+                  <a:srgbClr val="4A5A69"/>
                 </a:solidFill>
                 <a:latin typeface="Times New Roman" pitchFamily="34" charset="0"/>
                 <a:ea typeface="Times New Roman" pitchFamily="34" charset="-122"/>
@@ -2437,7 +2486,7 @@
             <a:r>
               <a:rPr lang="en-US" sz="1050" dirty="0">
                 <a:solidFill>
-                  <a:srgbClr val="A8BACC"/>
+                  <a:srgbClr val="4A5A69"/>
                 </a:solidFill>
               </a:rPr>
               <a:t>先满足在先流的申请速率，剩余带宽顺延给后续流——非公平共享；申请率 q 由统一引擎协议生成，不是优化变量</a:t>
@@ -2463,14 +2512,21 @@
             </a:avLst>
           </a:prstGeom>
           <a:solidFill>
-            <a:srgbClr val="18293E"/>
+            <a:srgbClr val="FFFFFF"/>
           </a:solidFill>
           <a:ln w="9525">
             <a:solidFill>
-              <a:srgbClr val="2B4159"/>
+              <a:srgbClr val="D9E2E9"/>
             </a:solidFill>
             <a:prstDash val="solid"/>
           </a:ln>
+          <a:effectLst>
+            <a:outerShdw sx="100000" sy="100000" kx="0" ky="0" algn="bl" rotWithShape="0" blurRad="88900" dist="25400" dir="5400000">
+              <a:srgbClr val="8AA0B4">
+                <a:alpha val="20000"/>
+              </a:srgbClr>
+            </a:outerShdw>
+          </a:effectLst>
         </p:spPr>
       </p:sp>
       <p:sp>
@@ -2500,7 +2556,7 @@
             <a:r>
               <a:rPr lang="en-US" sz="1250" b="1" dirty="0">
                 <a:solidFill>
-                  <a:srgbClr val="6FD6C9"/>
+                  <a:srgbClr val="0F766E"/>
                 </a:solidFill>
               </a:rPr>
               <a:t>逐层执行递推（式 3–6）</a:t>
@@ -2536,7 +2592,7 @@
             <a:r>
               <a:rPr lang="en-US" sz="1300" i="1" dirty="0">
                 <a:solidFill>
-                  <a:srgbClr val="EDF2F7"/>
+                  <a:srgbClr val="16232F"/>
                 </a:solidFill>
                 <a:latin typeface="Times New Roman" pitchFamily="34" charset="0"/>
                 <a:ea typeface="Times New Roman" pitchFamily="34" charset="-122"/>
@@ -2547,7 +2603,7 @@
             <a:r>
               <a:rPr lang="en-US" sz="1300" i="1" baseline="-40000" dirty="0">
                 <a:solidFill>
-                  <a:srgbClr val="EDF2F7"/>
+                  <a:srgbClr val="16232F"/>
                 </a:solidFill>
                 <a:latin typeface="Times New Roman" pitchFamily="34" charset="0"/>
                 <a:ea typeface="Times New Roman" pitchFamily="34" charset="-122"/>
@@ -2558,7 +2614,7 @@
             <a:r>
               <a:rPr lang="en-US" sz="1300" dirty="0">
                 <a:solidFill>
-                  <a:srgbClr val="EDF2F7"/>
+                  <a:srgbClr val="16232F"/>
                 </a:solidFill>
                 <a:latin typeface="Times New Roman" pitchFamily="34" charset="0"/>
                 <a:ea typeface="Times New Roman" pitchFamily="34" charset="-122"/>
@@ -2569,7 +2625,7 @@
             <a:r>
               <a:rPr lang="en-US" sz="1300" i="1" dirty="0">
                 <a:solidFill>
-                  <a:srgbClr val="EDF2F7"/>
+                  <a:srgbClr val="16232F"/>
                 </a:solidFill>
                 <a:latin typeface="Times New Roman" pitchFamily="34" charset="0"/>
                 <a:ea typeface="Times New Roman" pitchFamily="34" charset="-122"/>
@@ -2580,7 +2636,7 @@
             <a:r>
               <a:rPr lang="en-US" sz="1300" i="1" baseline="-40000" dirty="0">
                 <a:solidFill>
-                  <a:srgbClr val="EDF2F7"/>
+                  <a:srgbClr val="16232F"/>
                 </a:solidFill>
                 <a:latin typeface="Times New Roman" pitchFamily="34" charset="0"/>
                 <a:ea typeface="Times New Roman" pitchFamily="34" charset="-122"/>
@@ -2591,7 +2647,7 @@
             <a:r>
               <a:rPr lang="en-US" sz="1300" dirty="0">
                 <a:solidFill>
-                  <a:srgbClr val="EDF2F7"/>
+                  <a:srgbClr val="16232F"/>
                 </a:solidFill>
                 <a:latin typeface="Times New Roman" pitchFamily="34" charset="0"/>
                 <a:ea typeface="Times New Roman" pitchFamily="34" charset="-122"/>
@@ -2602,7 +2658,7 @@
             <a:r>
               <a:rPr lang="en-US" sz="1300" i="1" dirty="0">
                 <a:solidFill>
-                  <a:srgbClr val="EDF2F7"/>
+                  <a:srgbClr val="16232F"/>
                 </a:solidFill>
                 <a:latin typeface="Times New Roman" pitchFamily="34" charset="0"/>
                 <a:ea typeface="Times New Roman" pitchFamily="34" charset="-122"/>
@@ -2613,7 +2669,7 @@
             <a:r>
               <a:rPr lang="en-US" sz="1300" i="1" baseline="-40000" dirty="0">
                 <a:solidFill>
-                  <a:srgbClr val="EDF2F7"/>
+                  <a:srgbClr val="16232F"/>
                 </a:solidFill>
                 <a:latin typeface="Times New Roman" pitchFamily="34" charset="0"/>
                 <a:ea typeface="Times New Roman" pitchFamily="34" charset="-122"/>
@@ -2624,7 +2680,7 @@
             <a:r>
               <a:rPr lang="en-US" sz="1300" dirty="0">
                 <a:solidFill>
-                  <a:srgbClr val="EDF2F7"/>
+                  <a:srgbClr val="16232F"/>
                 </a:solidFill>
                 <a:latin typeface="Times New Roman" pitchFamily="34" charset="0"/>
                 <a:ea typeface="Times New Roman" pitchFamily="34" charset="-122"/>
@@ -2635,7 +2691,7 @@
             <a:r>
               <a:rPr lang="en-US" sz="1300" i="1" dirty="0">
                 <a:solidFill>
-                  <a:srgbClr val="EDF2F7"/>
+                  <a:srgbClr val="16232F"/>
                 </a:solidFill>
                 <a:latin typeface="Times New Roman" pitchFamily="34" charset="0"/>
                 <a:ea typeface="Times New Roman" pitchFamily="34" charset="-122"/>
@@ -2646,7 +2702,7 @@
             <a:r>
               <a:rPr lang="en-US" sz="1300" i="1" baseline="-40000" dirty="0">
                 <a:solidFill>
-                  <a:srgbClr val="EDF2F7"/>
+                  <a:srgbClr val="16232F"/>
                 </a:solidFill>
                 <a:latin typeface="Times New Roman" pitchFamily="34" charset="0"/>
                 <a:ea typeface="Times New Roman" pitchFamily="34" charset="-122"/>
@@ -2657,7 +2713,7 @@
             <a:r>
               <a:rPr lang="en-US" sz="1050" dirty="0">
                 <a:solidFill>
-                  <a:srgbClr val="A8BACC"/>
+                  <a:srgbClr val="4A5A69"/>
                 </a:solidFill>
                 <a:latin typeface="PingFang SC" pitchFamily="34" charset="0"/>
                 <a:ea typeface="PingFang SC" pitchFamily="34" charset="-122"/>
@@ -2696,7 +2752,7 @@
             <a:r>
               <a:rPr lang="en-US" sz="1300" i="1" dirty="0">
                 <a:solidFill>
-                  <a:srgbClr val="EDF2F7"/>
+                  <a:srgbClr val="16232F"/>
                 </a:solidFill>
                 <a:latin typeface="Times New Roman" pitchFamily="34" charset="0"/>
                 <a:ea typeface="Times New Roman" pitchFamily="34" charset="-122"/>
@@ -2707,7 +2763,7 @@
             <a:r>
               <a:rPr lang="en-US" sz="1300" i="1" baseline="-40000" dirty="0">
                 <a:solidFill>
-                  <a:srgbClr val="EDF2F7"/>
+                  <a:srgbClr val="16232F"/>
                 </a:solidFill>
                 <a:latin typeface="Times New Roman" pitchFamily="34" charset="0"/>
                 <a:ea typeface="Times New Roman" pitchFamily="34" charset="-122"/>
@@ -2718,7 +2774,7 @@
             <a:r>
               <a:rPr lang="en-US" sz="1300" dirty="0">
                 <a:solidFill>
-                  <a:srgbClr val="EDF2F7"/>
+                  <a:srgbClr val="16232F"/>
                 </a:solidFill>
                 <a:latin typeface="Times New Roman" pitchFamily="34" charset="0"/>
                 <a:ea typeface="Times New Roman" pitchFamily="34" charset="-122"/>
@@ -2729,7 +2785,7 @@
             <a:r>
               <a:rPr lang="en-US" sz="1300" i="1" dirty="0">
                 <a:solidFill>
-                  <a:srgbClr val="EDF2F7"/>
+                  <a:srgbClr val="16232F"/>
                 </a:solidFill>
                 <a:latin typeface="Times New Roman" pitchFamily="34" charset="0"/>
                 <a:ea typeface="Times New Roman" pitchFamily="34" charset="-122"/>
@@ -2740,7 +2796,7 @@
             <a:r>
               <a:rPr lang="en-US" sz="1300" i="1" baseline="-40000" dirty="0">
                 <a:solidFill>
-                  <a:srgbClr val="EDF2F7"/>
+                  <a:srgbClr val="16232F"/>
                 </a:solidFill>
                 <a:latin typeface="Times New Roman" pitchFamily="34" charset="0"/>
                 <a:ea typeface="Times New Roman" pitchFamily="34" charset="-122"/>
@@ -2751,7 +2807,7 @@
             <a:r>
               <a:rPr lang="en-US" sz="1300" dirty="0">
                 <a:solidFill>
-                  <a:srgbClr val="EDF2F7"/>
+                  <a:srgbClr val="16232F"/>
                 </a:solidFill>
                 <a:latin typeface="Times New Roman" pitchFamily="34" charset="0"/>
                 <a:ea typeface="Times New Roman" pitchFamily="34" charset="-122"/>
@@ -2762,7 +2818,7 @@
             <a:r>
               <a:rPr lang="en-US" sz="1300" i="1" dirty="0">
                 <a:solidFill>
-                  <a:srgbClr val="EDF2F7"/>
+                  <a:srgbClr val="16232F"/>
                 </a:solidFill>
                 <a:latin typeface="Times New Roman" pitchFamily="34" charset="0"/>
                 <a:ea typeface="Times New Roman" pitchFamily="34" charset="-122"/>
@@ -2773,7 +2829,7 @@
             <a:r>
               <a:rPr lang="en-US" sz="1300" i="1" baseline="-40000" dirty="0">
                 <a:solidFill>
-                  <a:srgbClr val="EDF2F7"/>
+                  <a:srgbClr val="16232F"/>
                 </a:solidFill>
                 <a:latin typeface="Times New Roman" pitchFamily="34" charset="0"/>
                 <a:ea typeface="Times New Roman" pitchFamily="34" charset="-122"/>
@@ -2784,7 +2840,7 @@
             <a:r>
               <a:rPr lang="en-US" sz="1300" dirty="0">
                 <a:solidFill>
-                  <a:srgbClr val="EDF2F7"/>
+                  <a:srgbClr val="16232F"/>
                 </a:solidFill>
                 <a:latin typeface="Times New Roman" pitchFamily="34" charset="0"/>
                 <a:ea typeface="Times New Roman" pitchFamily="34" charset="-122"/>
@@ -2795,7 +2851,7 @@
             <a:r>
               <a:rPr lang="en-US" sz="1300" i="1" dirty="0">
                 <a:solidFill>
-                  <a:srgbClr val="EDF2F7"/>
+                  <a:srgbClr val="16232F"/>
                 </a:solidFill>
                 <a:latin typeface="Times New Roman" pitchFamily="34" charset="0"/>
                 <a:ea typeface="Times New Roman" pitchFamily="34" charset="-122"/>
@@ -2806,7 +2862,7 @@
             <a:r>
               <a:rPr lang="en-US" sz="1300" i="1" baseline="-40000" dirty="0">
                 <a:solidFill>
-                  <a:srgbClr val="EDF2F7"/>
+                  <a:srgbClr val="16232F"/>
                 </a:solidFill>
                 <a:latin typeface="Times New Roman" pitchFamily="34" charset="0"/>
                 <a:ea typeface="Times New Roman" pitchFamily="34" charset="-122"/>
@@ -2817,7 +2873,7 @@
             <a:r>
               <a:rPr lang="en-US" sz="1300" dirty="0">
                 <a:solidFill>
-                  <a:srgbClr val="EDF2F7"/>
+                  <a:srgbClr val="16232F"/>
                 </a:solidFill>
                 <a:latin typeface="Times New Roman" pitchFamily="34" charset="0"/>
                 <a:ea typeface="Times New Roman" pitchFamily="34" charset="-122"/>
@@ -2828,7 +2884,7 @@
             <a:r>
               <a:rPr lang="en-US" sz="1300" i="1" dirty="0">
                 <a:solidFill>
-                  <a:srgbClr val="EDF2F7"/>
+                  <a:srgbClr val="16232F"/>
                 </a:solidFill>
                 <a:latin typeface="Times New Roman" pitchFamily="34" charset="0"/>
                 <a:ea typeface="Times New Roman" pitchFamily="34" charset="-122"/>
@@ -2839,7 +2895,7 @@
             <a:r>
               <a:rPr lang="en-US" sz="1300" i="1" baseline="-40000" dirty="0">
                 <a:solidFill>
-                  <a:srgbClr val="EDF2F7"/>
+                  <a:srgbClr val="16232F"/>
                 </a:solidFill>
                 <a:latin typeface="Times New Roman" pitchFamily="34" charset="0"/>
                 <a:ea typeface="Times New Roman" pitchFamily="34" charset="-122"/>
@@ -2850,7 +2906,7 @@
             <a:r>
               <a:rPr lang="en-US" sz="1300" dirty="0">
                 <a:solidFill>
-                  <a:srgbClr val="EDF2F7"/>
+                  <a:srgbClr val="16232F"/>
                 </a:solidFill>
                 <a:latin typeface="Times New Roman" pitchFamily="34" charset="0"/>
                 <a:ea typeface="Times New Roman" pitchFamily="34" charset="-122"/>
@@ -2861,7 +2917,7 @@
             <a:r>
               <a:rPr lang="en-US" sz="1300" i="1" dirty="0">
                 <a:solidFill>
-                  <a:srgbClr val="EDF2F7"/>
+                  <a:srgbClr val="16232F"/>
                 </a:solidFill>
                 <a:latin typeface="Times New Roman" pitchFamily="34" charset="0"/>
                 <a:ea typeface="Times New Roman" pitchFamily="34" charset="-122"/>
@@ -2872,7 +2928,7 @@
             <a:r>
               <a:rPr lang="en-US" sz="1300" i="1" baseline="-40000" dirty="0">
                 <a:solidFill>
-                  <a:srgbClr val="EDF2F7"/>
+                  <a:srgbClr val="16232F"/>
                 </a:solidFill>
                 <a:latin typeface="Times New Roman" pitchFamily="34" charset="0"/>
                 <a:ea typeface="Times New Roman" pitchFamily="34" charset="-122"/>
@@ -2883,7 +2939,7 @@
             <a:r>
               <a:rPr lang="en-US" sz="1300" dirty="0">
                 <a:solidFill>
-                  <a:srgbClr val="EDF2F7"/>
+                  <a:srgbClr val="16232F"/>
                 </a:solidFill>
                 <a:latin typeface="Times New Roman" pitchFamily="34" charset="0"/>
                 <a:ea typeface="Times New Roman" pitchFamily="34" charset="-122"/>
@@ -2894,7 +2950,7 @@
             <a:r>
               <a:rPr lang="en-US" sz="1300" i="1" dirty="0">
                 <a:solidFill>
-                  <a:srgbClr val="EDF2F7"/>
+                  <a:srgbClr val="16232F"/>
                 </a:solidFill>
                 <a:latin typeface="Times New Roman" pitchFamily="34" charset="0"/>
                 <a:ea typeface="Times New Roman" pitchFamily="34" charset="-122"/>
@@ -2905,7 +2961,7 @@
             <a:r>
               <a:rPr lang="en-US" sz="1300" i="1" baseline="-40000" dirty="0">
                 <a:solidFill>
-                  <a:srgbClr val="EDF2F7"/>
+                  <a:srgbClr val="16232F"/>
                 </a:solidFill>
                 <a:latin typeface="Times New Roman" pitchFamily="34" charset="0"/>
                 <a:ea typeface="Times New Roman" pitchFamily="34" charset="-122"/>
@@ -2916,7 +2972,7 @@
             <a:r>
               <a:rPr lang="en-US" sz="1300" dirty="0">
                 <a:solidFill>
-                  <a:srgbClr val="EDF2F7"/>
+                  <a:srgbClr val="16232F"/>
                 </a:solidFill>
                 <a:latin typeface="Times New Roman" pitchFamily="34" charset="0"/>
                 <a:ea typeface="Times New Roman" pitchFamily="34" charset="-122"/>
@@ -2927,7 +2983,7 @@
             <a:r>
               <a:rPr lang="en-US" sz="1300" i="1" dirty="0">
                 <a:solidFill>
-                  <a:srgbClr val="EDF2F7"/>
+                  <a:srgbClr val="16232F"/>
                 </a:solidFill>
                 <a:latin typeface="Times New Roman" pitchFamily="34" charset="0"/>
                 <a:ea typeface="Times New Roman" pitchFamily="34" charset="-122"/>
@@ -2938,7 +2994,7 @@
             <a:r>
               <a:rPr lang="en-US" sz="1300" i="1" baseline="-40000" dirty="0">
                 <a:solidFill>
-                  <a:srgbClr val="EDF2F7"/>
+                  <a:srgbClr val="16232F"/>
                 </a:solidFill>
                 <a:latin typeface="Times New Roman" pitchFamily="34" charset="0"/>
                 <a:ea typeface="Times New Roman" pitchFamily="34" charset="-122"/>
@@ -2977,7 +3033,7 @@
             <a:r>
               <a:rPr lang="en-US" sz="1050" dirty="0">
                 <a:solidFill>
-                  <a:srgbClr val="A8BACC"/>
+                  <a:srgbClr val="4A5A69"/>
                 </a:solidFill>
                 <a:latin typeface="PingFang SC" pitchFamily="34" charset="0"/>
                 <a:ea typeface="PingFang SC" pitchFamily="34" charset="-122"/>
@@ -2988,7 +3044,7 @@
             <a:r>
               <a:rPr lang="en-US" sz="1050" dirty="0">
                 <a:solidFill>
-                  <a:srgbClr val="A8BACC"/>
+                  <a:srgbClr val="4A5A69"/>
                 </a:solidFill>
                 <a:latin typeface="Times New Roman" pitchFamily="34" charset="0"/>
                 <a:ea typeface="Times New Roman" pitchFamily="34" charset="-122"/>
@@ -2999,7 +3055,7 @@
             <a:r>
               <a:rPr lang="en-US" sz="1050" i="1" dirty="0">
                 <a:solidFill>
-                  <a:srgbClr val="A8BACC"/>
+                  <a:srgbClr val="4A5A69"/>
                 </a:solidFill>
                 <a:latin typeface="Times New Roman" pitchFamily="34" charset="0"/>
                 <a:ea typeface="Times New Roman" pitchFamily="34" charset="-122"/>
@@ -3010,7 +3066,7 @@
             <a:r>
               <a:rPr lang="en-US" sz="1050" i="1" baseline="-40000" dirty="0">
                 <a:solidFill>
-                  <a:srgbClr val="A8BACC"/>
+                  <a:srgbClr val="4A5A69"/>
                 </a:solidFill>
                 <a:latin typeface="Times New Roman" pitchFamily="34" charset="0"/>
                 <a:ea typeface="Times New Roman" pitchFamily="34" charset="-122"/>
@@ -3021,7 +3077,7 @@
             <a:r>
               <a:rPr lang="en-US" sz="1050" dirty="0">
                 <a:solidFill>
-                  <a:srgbClr val="A8BACC"/>
+                  <a:srgbClr val="4A5A69"/>
                 </a:solidFill>
                 <a:latin typeface="Times New Roman" pitchFamily="34" charset="0"/>
                 <a:ea typeface="Times New Roman" pitchFamily="34" charset="-122"/>
@@ -3032,7 +3088,7 @@
             <a:r>
               <a:rPr lang="en-US" sz="1050" i="1" dirty="0">
                 <a:solidFill>
-                  <a:srgbClr val="A8BACC"/>
+                  <a:srgbClr val="4A5A69"/>
                 </a:solidFill>
                 <a:latin typeface="Times New Roman" pitchFamily="34" charset="0"/>
                 <a:ea typeface="Times New Roman" pitchFamily="34" charset="-122"/>
@@ -3043,7 +3099,7 @@
             <a:r>
               <a:rPr lang="en-US" sz="1050" i="1" baseline="-40000" dirty="0">
                 <a:solidFill>
-                  <a:srgbClr val="A8BACC"/>
+                  <a:srgbClr val="4A5A69"/>
                 </a:solidFill>
                 <a:latin typeface="Times New Roman" pitchFamily="34" charset="0"/>
                 <a:ea typeface="Times New Roman" pitchFamily="34" charset="-122"/>
@@ -3054,7 +3110,7 @@
             <a:r>
               <a:rPr lang="en-US" sz="1050" dirty="0">
                 <a:solidFill>
-                  <a:srgbClr val="A8BACC"/>
+                  <a:srgbClr val="4A5A69"/>
                 </a:solidFill>
                 <a:latin typeface="Times New Roman" pitchFamily="34" charset="0"/>
                 <a:ea typeface="Times New Roman" pitchFamily="34" charset="-122"/>
@@ -3065,7 +3121,7 @@
             <a:r>
               <a:rPr lang="en-US" sz="1050" i="1" dirty="0">
                 <a:solidFill>
-                  <a:srgbClr val="A8BACC"/>
+                  <a:srgbClr val="4A5A69"/>
                 </a:solidFill>
                 <a:latin typeface="Times New Roman" pitchFamily="34" charset="0"/>
                 <a:ea typeface="Times New Roman" pitchFamily="34" charset="-122"/>
@@ -3076,7 +3132,7 @@
             <a:r>
               <a:rPr lang="en-US" sz="1050" i="1" baseline="-40000" dirty="0">
                 <a:solidFill>
-                  <a:srgbClr val="A8BACC"/>
+                  <a:srgbClr val="4A5A69"/>
                 </a:solidFill>
                 <a:latin typeface="Times New Roman" pitchFamily="34" charset="0"/>
                 <a:ea typeface="Times New Roman" pitchFamily="34" charset="-122"/>
@@ -3087,7 +3143,7 @@
             <a:r>
               <a:rPr lang="en-US" sz="1050" dirty="0">
                 <a:solidFill>
-                  <a:srgbClr val="A8BACC"/>
+                  <a:srgbClr val="4A5A69"/>
                 </a:solidFill>
                 <a:latin typeface="Times New Roman" pitchFamily="34" charset="0"/>
                 <a:ea typeface="Times New Roman" pitchFamily="34" charset="-122"/>
@@ -3098,7 +3154,7 @@
             <a:r>
               <a:rPr lang="en-US" sz="1050" i="1" dirty="0">
                 <a:solidFill>
-                  <a:srgbClr val="A8BACC"/>
+                  <a:srgbClr val="4A5A69"/>
                 </a:solidFill>
                 <a:latin typeface="Times New Roman" pitchFamily="34" charset="0"/>
                 <a:ea typeface="Times New Roman" pitchFamily="34" charset="-122"/>
@@ -3109,7 +3165,7 @@
             <a:r>
               <a:rPr lang="en-US" sz="1050" i="1" baseline="-40000" dirty="0">
                 <a:solidFill>
-                  <a:srgbClr val="A8BACC"/>
+                  <a:srgbClr val="4A5A69"/>
                 </a:solidFill>
                 <a:latin typeface="Times New Roman" pitchFamily="34" charset="0"/>
                 <a:ea typeface="Times New Roman" pitchFamily="34" charset="-122"/>
@@ -3120,7 +3176,7 @@
             <a:r>
               <a:rPr lang="en-US" sz="1050" dirty="0">
                 <a:solidFill>
-                  <a:srgbClr val="A8BACC"/>
+                  <a:srgbClr val="4A5A69"/>
                 </a:solidFill>
                 <a:latin typeface="Times New Roman" pitchFamily="34" charset="0"/>
                 <a:ea typeface="Times New Roman" pitchFamily="34" charset="-122"/>
@@ -3131,7 +3187,7 @@
             <a:r>
               <a:rPr lang="en-US" sz="1050" dirty="0">
                 <a:solidFill>
-                  <a:srgbClr val="A8BACC"/>
+                  <a:srgbClr val="4A5A69"/>
                 </a:solidFill>
                 <a:latin typeface="PingFang SC" pitchFamily="34" charset="0"/>
                 <a:ea typeface="PingFang SC" pitchFamily="34" charset="-122"/>
@@ -3160,14 +3216,21 @@
             </a:avLst>
           </a:prstGeom>
           <a:solidFill>
-            <a:srgbClr val="18293E"/>
+            <a:srgbClr val="FFFFFF"/>
           </a:solidFill>
           <a:ln w="9525">
             <a:solidFill>
-              <a:srgbClr val="2B4159"/>
+              <a:srgbClr val="D9E2E9"/>
             </a:solidFill>
             <a:prstDash val="solid"/>
           </a:ln>
+          <a:effectLst>
+            <a:outerShdw sx="100000" sy="100000" kx="0" ky="0" algn="bl" rotWithShape="0" blurRad="88900" dist="25400" dir="5400000">
+              <a:srgbClr val="8AA0B4">
+                <a:alpha val="20000"/>
+              </a:srgbClr>
+            </a:outerShdw>
+          </a:effectLst>
         </p:spPr>
       </p:sp>
       <p:sp>
@@ -3197,7 +3260,7 @@
             <a:r>
               <a:rPr lang="en-US" sz="1250" b="1" dirty="0">
                 <a:solidFill>
-                  <a:srgbClr val="6FD6C9"/>
+                  <a:srgbClr val="0F766E"/>
                 </a:solidFill>
               </a:rPr>
               <a:t>TTFT 三段分解（式 7）</a:t>
@@ -3233,7 +3296,7 @@
             <a:r>
               <a:rPr lang="en-US" sz="1400" i="1" dirty="0">
                 <a:solidFill>
-                  <a:srgbClr val="EDF2F7"/>
+                  <a:srgbClr val="16232F"/>
                 </a:solidFill>
                 <a:latin typeface="Times New Roman" pitchFamily="34" charset="0"/>
                 <a:ea typeface="Times New Roman" pitchFamily="34" charset="-122"/>
@@ -3244,7 +3307,7 @@
             <a:r>
               <a:rPr lang="en-US" sz="1400" i="1" baseline="-40000" dirty="0">
                 <a:solidFill>
-                  <a:srgbClr val="EDF2F7"/>
+                  <a:srgbClr val="16232F"/>
                 </a:solidFill>
                 <a:latin typeface="Times New Roman" pitchFamily="34" charset="0"/>
                 <a:ea typeface="Times New Roman" pitchFamily="34" charset="-122"/>
@@ -3255,7 +3318,7 @@
             <a:r>
               <a:rPr lang="en-US" sz="1400" dirty="0">
                 <a:solidFill>
-                  <a:srgbClr val="EDF2F7"/>
+                  <a:srgbClr val="16232F"/>
                 </a:solidFill>
                 <a:latin typeface="Times New Roman" pitchFamily="34" charset="0"/>
                 <a:ea typeface="Times New Roman" pitchFamily="34" charset="-122"/>
@@ -3266,7 +3329,7 @@
             <a:r>
               <a:rPr lang="en-US" sz="1400" i="1" dirty="0">
                 <a:solidFill>
-                  <a:srgbClr val="EDF2F7"/>
+                  <a:srgbClr val="16232F"/>
                 </a:solidFill>
                 <a:latin typeface="Times New Roman" pitchFamily="34" charset="0"/>
                 <a:ea typeface="Times New Roman" pitchFamily="34" charset="-122"/>
@@ -3277,7 +3340,7 @@
             <a:r>
               <a:rPr lang="en-US" sz="1400" i="1" baseline="-40000" dirty="0">
                 <a:solidFill>
-                  <a:srgbClr val="EDF2F7"/>
+                  <a:srgbClr val="16232F"/>
                 </a:solidFill>
                 <a:latin typeface="Times New Roman" pitchFamily="34" charset="0"/>
                 <a:ea typeface="Times New Roman" pitchFamily="34" charset="-122"/>
@@ -3288,7 +3351,7 @@
             <a:r>
               <a:rPr lang="en-US" sz="1400" dirty="0">
                 <a:solidFill>
-                  <a:srgbClr val="EDF2F7"/>
+                  <a:srgbClr val="16232F"/>
                 </a:solidFill>
                 <a:latin typeface="Times New Roman" pitchFamily="34" charset="0"/>
                 <a:ea typeface="Times New Roman" pitchFamily="34" charset="-122"/>
@@ -3299,7 +3362,7 @@
             <a:r>
               <a:rPr lang="en-US" sz="1400" i="1" dirty="0">
                 <a:solidFill>
-                  <a:srgbClr val="EDF2F7"/>
+                  <a:srgbClr val="16232F"/>
                 </a:solidFill>
                 <a:latin typeface="Times New Roman" pitchFamily="34" charset="0"/>
                 <a:ea typeface="Times New Roman" pitchFamily="34" charset="-122"/>
@@ -3310,7 +3373,7 @@
             <a:r>
               <a:rPr lang="en-US" sz="1400" i="1" baseline="-40000" dirty="0">
                 <a:solidFill>
-                  <a:srgbClr val="EDF2F7"/>
+                  <a:srgbClr val="16232F"/>
                 </a:solidFill>
                 <a:latin typeface="Times New Roman" pitchFamily="34" charset="0"/>
                 <a:ea typeface="Times New Roman" pitchFamily="34" charset="-122"/>
@@ -3321,7 +3384,7 @@
             <a:r>
               <a:rPr lang="en-US" sz="1400" dirty="0">
                 <a:solidFill>
-                  <a:srgbClr val="EDF2F7"/>
+                  <a:srgbClr val="16232F"/>
                 </a:solidFill>
                 <a:latin typeface="Times New Roman" pitchFamily="34" charset="0"/>
                 <a:ea typeface="Times New Roman" pitchFamily="34" charset="-122"/>
@@ -3332,7 +3395,7 @@
             <a:r>
               <a:rPr lang="en-US" sz="1400" i="1" dirty="0">
                 <a:solidFill>
-                  <a:srgbClr val="EDF2F7"/>
+                  <a:srgbClr val="16232F"/>
                 </a:solidFill>
                 <a:latin typeface="Times New Roman" pitchFamily="34" charset="0"/>
                 <a:ea typeface="Times New Roman" pitchFamily="34" charset="-122"/>
@@ -3343,7 +3406,7 @@
             <a:r>
               <a:rPr lang="en-US" sz="1400" i="1" baseline="-40000" dirty="0">
                 <a:solidFill>
-                  <a:srgbClr val="EDF2F7"/>
+                  <a:srgbClr val="16232F"/>
                 </a:solidFill>
                 <a:latin typeface="Times New Roman" pitchFamily="34" charset="0"/>
                 <a:ea typeface="Times New Roman" pitchFamily="34" charset="-122"/>
@@ -3354,7 +3417,7 @@
             <a:r>
               <a:rPr lang="en-US" sz="1400" dirty="0">
                 <a:solidFill>
-                  <a:srgbClr val="EDF2F7"/>
+                  <a:srgbClr val="16232F"/>
                 </a:solidFill>
                 <a:latin typeface="Times New Roman" pitchFamily="34" charset="0"/>
                 <a:ea typeface="Times New Roman" pitchFamily="34" charset="-122"/>
@@ -3365,7 +3428,7 @@
             <a:r>
               <a:rPr lang="en-US" sz="1400" i="1" dirty="0">
                 <a:solidFill>
-                  <a:srgbClr val="EDF2F7"/>
+                  <a:srgbClr val="16232F"/>
                 </a:solidFill>
                 <a:latin typeface="Times New Roman" pitchFamily="34" charset="0"/>
                 <a:ea typeface="Times New Roman" pitchFamily="34" charset="-122"/>
@@ -3376,7 +3439,7 @@
             <a:r>
               <a:rPr lang="en-US" sz="1400" i="1" baseline="-40000" dirty="0">
                 <a:solidFill>
-                  <a:srgbClr val="EDF2F7"/>
+                  <a:srgbClr val="16232F"/>
                 </a:solidFill>
                 <a:latin typeface="Times New Roman" pitchFamily="34" charset="0"/>
                 <a:ea typeface="Times New Roman" pitchFamily="34" charset="-122"/>
@@ -3387,7 +3450,7 @@
             <a:r>
               <a:rPr lang="en-US" sz="1400" dirty="0">
                 <a:solidFill>
-                  <a:srgbClr val="EDF2F7"/>
+                  <a:srgbClr val="16232F"/>
                 </a:solidFill>
                 <a:latin typeface="Times New Roman" pitchFamily="34" charset="0"/>
                 <a:ea typeface="Times New Roman" pitchFamily="34" charset="-122"/>
@@ -3398,7 +3461,7 @@
             <a:r>
               <a:rPr lang="en-US" sz="1400" i="1" dirty="0">
                 <a:solidFill>
-                  <a:srgbClr val="EDF2F7"/>
+                  <a:srgbClr val="16232F"/>
                 </a:solidFill>
                 <a:latin typeface="Times New Roman" pitchFamily="34" charset="0"/>
                 <a:ea typeface="Times New Roman" pitchFamily="34" charset="-122"/>
@@ -3409,7 +3472,7 @@
             <a:r>
               <a:rPr lang="en-US" sz="1400" i="1" baseline="-40000" dirty="0">
                 <a:solidFill>
-                  <a:srgbClr val="EDF2F7"/>
+                  <a:srgbClr val="16232F"/>
                 </a:solidFill>
                 <a:latin typeface="Times New Roman" pitchFamily="34" charset="0"/>
                 <a:ea typeface="Times New Roman" pitchFamily="34" charset="-122"/>
@@ -3420,7 +3483,7 @@
             <a:r>
               <a:rPr lang="en-US" sz="1400" dirty="0">
                 <a:solidFill>
-                  <a:srgbClr val="EDF2F7"/>
+                  <a:srgbClr val="16232F"/>
                 </a:solidFill>
                 <a:latin typeface="Times New Roman" pitchFamily="34" charset="0"/>
                 <a:ea typeface="Times New Roman" pitchFamily="34" charset="-122"/>
@@ -3431,7 +3494,7 @@
             <a:r>
               <a:rPr lang="en-US" sz="1400" i="1" dirty="0">
                 <a:solidFill>
-                  <a:srgbClr val="EDF2F7"/>
+                  <a:srgbClr val="16232F"/>
                 </a:solidFill>
                 <a:latin typeface="Times New Roman" pitchFamily="34" charset="0"/>
                 <a:ea typeface="Times New Roman" pitchFamily="34" charset="-122"/>
@@ -3442,7 +3505,7 @@
             <a:r>
               <a:rPr lang="en-US" sz="1400" i="1" baseline="-40000" dirty="0">
                 <a:solidFill>
-                  <a:srgbClr val="EDF2F7"/>
+                  <a:srgbClr val="16232F"/>
                 </a:solidFill>
                 <a:latin typeface="Times New Roman" pitchFamily="34" charset="0"/>
                 <a:ea typeface="Times New Roman" pitchFamily="34" charset="-122"/>
@@ -3453,7 +3516,7 @@
             <a:r>
               <a:rPr lang="en-US" sz="1100" dirty="0">
                 <a:solidFill>
-                  <a:srgbClr val="E89B2D"/>
+                  <a:srgbClr val="B45309"/>
                 </a:solidFill>
                 <a:latin typeface="PingFang SC" pitchFamily="34" charset="0"/>
                 <a:ea typeface="PingFang SC" pitchFamily="34" charset="-122"/>
@@ -3492,7 +3555,7 @@
             <a:r>
               <a:rPr lang="en-US" sz="1050" dirty="0">
                 <a:solidFill>
-                  <a:srgbClr val="A8BACC"/>
+                  <a:srgbClr val="4A5A69"/>
                 </a:solidFill>
               </a:rPr>
               <a:t>K 为整批同步计算时间，不可按成员数均摊；读取藏于计算窗口内不计 STALL——批计算收益与带宽需求此消彼长</a:t>
@@ -3518,7 +3581,7 @@
             </a:avLst>
           </a:prstGeom>
           <a:solidFill>
-            <a:srgbClr val="142437"/>
+            <a:srgbClr val="ECF3F2"/>
           </a:solidFill>
           <a:ln/>
         </p:spPr>
@@ -3550,7 +3613,7 @@
             <a:r>
               <a:rPr lang="en-US" sz="1100" b="1" dirty="0">
                 <a:solidFill>
-                  <a:srgbClr val="6FD6C9"/>
+                  <a:srgbClr val="0F766E"/>
                 </a:solidFill>
                 <a:latin typeface="PingFang SC" pitchFamily="34" charset="0"/>
                 <a:ea typeface="PingFang SC" pitchFamily="34" charset="-122"/>
@@ -3561,7 +3624,7 @@
             <a:r>
               <a:rPr lang="en-US" sz="1050" dirty="0">
                 <a:solidFill>
-                  <a:srgbClr val="EDF2F7"/>
+                  <a:srgbClr val="16232F"/>
                 </a:solidFill>
                 <a:latin typeface="Times New Roman" pitchFamily="34" charset="0"/>
                 <a:ea typeface="Times New Roman" pitchFamily="34" charset="-122"/>
@@ -3572,7 +3635,7 @@
             <a:r>
               <a:rPr lang="en-US" sz="1050" i="1" baseline="-40000" dirty="0">
                 <a:solidFill>
-                  <a:srgbClr val="EDF2F7"/>
+                  <a:srgbClr val="16232F"/>
                 </a:solidFill>
                 <a:latin typeface="Times New Roman" pitchFamily="34" charset="0"/>
                 <a:ea typeface="Times New Roman" pitchFamily="34" charset="-122"/>
@@ -3583,7 +3646,7 @@
             <a:r>
               <a:rPr lang="en-US" sz="1050" dirty="0">
                 <a:solidFill>
-                  <a:srgbClr val="EDF2F7"/>
+                  <a:srgbClr val="16232F"/>
                 </a:solidFill>
                 <a:latin typeface="Times New Roman" pitchFamily="34" charset="0"/>
                 <a:ea typeface="Times New Roman" pitchFamily="34" charset="-122"/>
@@ -3594,7 +3657,7 @@
             <a:r>
               <a:rPr lang="en-US" sz="1050" i="1" dirty="0">
                 <a:solidFill>
-                  <a:srgbClr val="EDF2F7"/>
+                  <a:srgbClr val="16232F"/>
                 </a:solidFill>
                 <a:latin typeface="Times New Roman" pitchFamily="34" charset="0"/>
                 <a:ea typeface="Times New Roman" pitchFamily="34" charset="-122"/>
@@ -3605,7 +3668,7 @@
             <a:r>
               <a:rPr lang="en-US" sz="1050" i="1" baseline="-40000" dirty="0">
                 <a:solidFill>
-                  <a:srgbClr val="EDF2F7"/>
+                  <a:srgbClr val="16232F"/>
                 </a:solidFill>
                 <a:latin typeface="Times New Roman" pitchFamily="34" charset="0"/>
                 <a:ea typeface="Times New Roman" pitchFamily="34" charset="-122"/>
@@ -3616,7 +3679,7 @@
             <a:r>
               <a:rPr lang="en-US" sz="1050" dirty="0">
                 <a:solidFill>
-                  <a:srgbClr val="A8BACC"/>
+                  <a:srgbClr val="4A5A69"/>
                 </a:solidFill>
                 <a:latin typeface="PingFang SC" pitchFamily="34" charset="0"/>
                 <a:ea typeface="PingFang SC" pitchFamily="34" charset="-122"/>
@@ -3627,7 +3690,7 @@
             <a:r>
               <a:rPr lang="en-US" sz="1050" dirty="0">
                 <a:solidFill>
-                  <a:srgbClr val="EDF2F7"/>
+                  <a:srgbClr val="16232F"/>
                 </a:solidFill>
                 <a:latin typeface="Times New Roman" pitchFamily="34" charset="0"/>
                 <a:ea typeface="Times New Roman" pitchFamily="34" charset="-122"/>
@@ -3638,7 +3701,7 @@
             <a:r>
               <a:rPr lang="en-US" sz="1050" i="1" baseline="-40000" dirty="0">
                 <a:solidFill>
-                  <a:srgbClr val="EDF2F7"/>
+                  <a:srgbClr val="16232F"/>
                 </a:solidFill>
                 <a:latin typeface="Times New Roman" pitchFamily="34" charset="0"/>
                 <a:ea typeface="Times New Roman" pitchFamily="34" charset="-122"/>
@@ -3649,7 +3712,7 @@
             <a:r>
               <a:rPr lang="en-US" sz="1050" dirty="0">
                 <a:solidFill>
-                  <a:srgbClr val="EDF2F7"/>
+                  <a:srgbClr val="16232F"/>
                 </a:solidFill>
                 <a:latin typeface="Times New Roman" pitchFamily="34" charset="0"/>
                 <a:ea typeface="Times New Roman" pitchFamily="34" charset="-122"/>
@@ -3660,7 +3723,7 @@
             <a:r>
               <a:rPr lang="en-US" sz="1050" i="1" dirty="0">
                 <a:solidFill>
-                  <a:srgbClr val="EDF2F7"/>
+                  <a:srgbClr val="16232F"/>
                 </a:solidFill>
                 <a:latin typeface="Times New Roman" pitchFamily="34" charset="0"/>
                 <a:ea typeface="Times New Roman" pitchFamily="34" charset="-122"/>
@@ -3671,7 +3734,7 @@
             <a:r>
               <a:rPr lang="en-US" sz="1050" i="1" baseline="-40000" dirty="0">
                 <a:solidFill>
-                  <a:srgbClr val="EDF2F7"/>
+                  <a:srgbClr val="16232F"/>
                 </a:solidFill>
                 <a:latin typeface="Times New Roman" pitchFamily="34" charset="0"/>
                 <a:ea typeface="Times New Roman" pitchFamily="34" charset="-122"/>
@@ -3682,7 +3745,7 @@
             <a:r>
               <a:rPr lang="en-US" sz="1050" i="1" dirty="0">
                 <a:solidFill>
-                  <a:srgbClr val="EDF2F7"/>
+                  <a:srgbClr val="16232F"/>
                 </a:solidFill>
                 <a:latin typeface="Times New Roman" pitchFamily="34" charset="0"/>
                 <a:ea typeface="Times New Roman" pitchFamily="34" charset="-122"/>
@@ -3693,7 +3756,7 @@
             <a:r>
               <a:rPr lang="en-US" sz="1050" i="1" baseline="-40000" dirty="0">
                 <a:solidFill>
-                  <a:srgbClr val="EDF2F7"/>
+                  <a:srgbClr val="16232F"/>
                 </a:solidFill>
                 <a:latin typeface="Times New Roman" pitchFamily="34" charset="0"/>
                 <a:ea typeface="Times New Roman" pitchFamily="34" charset="-122"/>
@@ -3704,7 +3767,7 @@
             <a:r>
               <a:rPr lang="en-US" sz="1050" dirty="0">
                 <a:solidFill>
-                  <a:srgbClr val="EDF2F7"/>
+                  <a:srgbClr val="16232F"/>
                 </a:solidFill>
                 <a:latin typeface="Times New Roman" pitchFamily="34" charset="0"/>
                 <a:ea typeface="Times New Roman" pitchFamily="34" charset="-122"/>
@@ -3715,7 +3778,7 @@
             <a:r>
               <a:rPr lang="en-US" sz="1050" i="1" dirty="0">
                 <a:solidFill>
-                  <a:srgbClr val="EDF2F7"/>
+                  <a:srgbClr val="16232F"/>
                 </a:solidFill>
                 <a:latin typeface="Times New Roman" pitchFamily="34" charset="0"/>
                 <a:ea typeface="Times New Roman" pitchFamily="34" charset="-122"/>
@@ -3726,7 +3789,7 @@
             <a:r>
               <a:rPr lang="en-US" sz="1050" i="1" baseline="-40000" dirty="0">
                 <a:solidFill>
-                  <a:srgbClr val="EDF2F7"/>
+                  <a:srgbClr val="16232F"/>
                 </a:solidFill>
                 <a:latin typeface="Times New Roman" pitchFamily="34" charset="0"/>
                 <a:ea typeface="Times New Roman" pitchFamily="34" charset="-122"/>
@@ -3737,7 +3800,7 @@
             <a:r>
               <a:rPr lang="en-US" sz="1050" dirty="0">
                 <a:solidFill>
-                  <a:srgbClr val="EDF2F7"/>
+                  <a:srgbClr val="16232F"/>
                 </a:solidFill>
                 <a:latin typeface="Times New Roman" pitchFamily="34" charset="0"/>
                 <a:ea typeface="Times New Roman" pitchFamily="34" charset="-122"/>
@@ -3748,7 +3811,7 @@
             <a:r>
               <a:rPr lang="en-US" sz="1050" i="1" dirty="0">
                 <a:solidFill>
-                  <a:srgbClr val="EDF2F7"/>
+                  <a:srgbClr val="16232F"/>
                 </a:solidFill>
                 <a:latin typeface="Times New Roman" pitchFamily="34" charset="0"/>
                 <a:ea typeface="Times New Roman" pitchFamily="34" charset="-122"/>
@@ -3759,7 +3822,7 @@
             <a:r>
               <a:rPr lang="en-US" sz="1050" i="1" baseline="-40000" dirty="0">
                 <a:solidFill>
-                  <a:srgbClr val="EDF2F7"/>
+                  <a:srgbClr val="16232F"/>
                 </a:solidFill>
                 <a:latin typeface="Times New Roman" pitchFamily="34" charset="0"/>
                 <a:ea typeface="Times New Roman" pitchFamily="34" charset="-122"/>
@@ -3770,7 +3833,7 @@
             <a:r>
               <a:rPr lang="en-US" sz="1050" dirty="0">
                 <a:solidFill>
-                  <a:srgbClr val="EDF2F7"/>
+                  <a:srgbClr val="16232F"/>
                 </a:solidFill>
                 <a:latin typeface="Times New Roman" pitchFamily="34" charset="0"/>
                 <a:ea typeface="Times New Roman" pitchFamily="34" charset="-122"/>
@@ -3781,7 +3844,7 @@
             <a:r>
               <a:rPr lang="en-US" sz="1050" dirty="0">
                 <a:solidFill>
-                  <a:srgbClr val="A8BACC"/>
+                  <a:srgbClr val="4A5A69"/>
                 </a:solidFill>
                 <a:latin typeface="PingFang SC" pitchFamily="34" charset="0"/>
                 <a:ea typeface="PingFang SC" pitchFamily="34" charset="-122"/>
@@ -3792,7 +3855,7 @@
             <a:r>
               <a:rPr lang="en-US" sz="1050" i="1" dirty="0">
                 <a:solidFill>
-                  <a:srgbClr val="EDF2F7"/>
+                  <a:srgbClr val="16232F"/>
                 </a:solidFill>
                 <a:latin typeface="Times New Roman" pitchFamily="34" charset="0"/>
                 <a:ea typeface="Times New Roman" pitchFamily="34" charset="-122"/>
@@ -3803,7 +3866,7 @@
             <a:r>
               <a:rPr lang="en-US" sz="1050" i="1" baseline="-40000" dirty="0">
                 <a:solidFill>
-                  <a:srgbClr val="EDF2F7"/>
+                  <a:srgbClr val="16232F"/>
                 </a:solidFill>
                 <a:latin typeface="Times New Roman" pitchFamily="34" charset="0"/>
                 <a:ea typeface="Times New Roman" pitchFamily="34" charset="-122"/>
@@ -3814,7 +3877,7 @@
             <a:r>
               <a:rPr lang="en-US" sz="1050" dirty="0">
                 <a:solidFill>
-                  <a:srgbClr val="A8BACC"/>
+                  <a:srgbClr val="4A5A69"/>
                 </a:solidFill>
                 <a:latin typeface="PingFang SC" pitchFamily="34" charset="0"/>
                 <a:ea typeface="PingFang SC" pitchFamily="34" charset="-122"/>
@@ -3840,7 +3903,7 @@
     <p:bg>
       <p:bgPr>
         <a:solidFill>
-          <a:srgbClr val="FAFBFC"/>
+          <a:srgbClr val="FFFFFF"/>
         </a:solidFill>
       </p:bgPr>
     </p:bg>
@@ -3957,7 +4020,7 @@
             <a:r>
               <a:rPr lang="en-US" sz="1100" dirty="0">
                 <a:solidFill>
-                  <a:srgbClr val="5D6F80"/>
+                  <a:srgbClr val="4A5A69"/>
                 </a:solidFill>
               </a:rPr>
               <a:t>《共享 KV 统一队列下的 Batch 效率与错峰调度形式化分析》§6–§11 · G1–G6 封闭问题 → NP-hard → 证书与在线算法</a:t>
@@ -4251,7 +4314,7 @@
             <a:r>
               <a:rPr lang="en-US" sz="1050" dirty="0">
                 <a:solidFill>
-                  <a:srgbClr val="5D6F80"/>
+                  <a:srgbClr val="4A5A69"/>
                 </a:solidFill>
               </a:rPr>
               <a:t>最小全部完成时间 M</a:t>
@@ -4498,7 +4561,7 @@
             <a:r>
               <a:rPr lang="en-US" sz="1050" dirty="0">
                 <a:solidFill>
-                  <a:srgbClr val="5D6F80"/>
+                  <a:srgbClr val="4A5A69"/>
                 </a:solidFill>
               </a:rPr>
               <a:t>SLO 失败率（满足率 = 1 − J）</a:t>
@@ -4745,7 +4808,7 @@
             <a:r>
               <a:rPr lang="en-US" sz="1050" dirty="0">
                 <a:solidFill>
-                  <a:srgbClr val="5D6F80"/>
+                  <a:srgbClr val="4A5A69"/>
                 </a:solidFill>
               </a:rPr>
               <a:t>平均 TTFT（含中央等待）</a:t>
@@ -5025,7 +5088,7 @@
             <a:r>
               <a:rPr lang="en-US" sz="1050" dirty="0">
                 <a:solidFill>
-                  <a:srgbClr val="5D6F80"/>
+                  <a:srgbClr val="4A5A69"/>
                 </a:solidFill>
               </a:rPr>
               <a:t>平均归一化 TTFT（短请求权重更大）</a:t>
@@ -6202,7 +6265,7 @@
             <a:r>
               <a:rPr lang="en-US" sz="1050" dirty="0">
                 <a:solidFill>
-                  <a:srgbClr val="5D6F80"/>
+                  <a:srgbClr val="4A5A69"/>
                 </a:solidFill>
               </a:rPr>
               <a:t>「关闭组批 / 读取 / 多层」的子问题已含经典难例 ⇒ 一般问题至少同样难；≠ 小规模不可精确求解，也不排除近似算法</a:t>
@@ -6639,7 +6702,7 @@
     <p:bg>
       <p:bgPr>
         <a:solidFill>
-          <a:srgbClr val="FAFBFC"/>
+          <a:srgbClr val="FFFFFF"/>
         </a:solidFill>
       </p:bgPr>
     </p:bg>
@@ -6756,7 +6819,7 @@
             <a:r>
               <a:rPr lang="en-US" sz="1100" dirty="0">
                 <a:solidFill>
-                  <a:srgbClr val="5D6F80"/>
+                  <a:srgbClr val="4A5A69"/>
                 </a:solidFill>
               </a:rPr>
               <a:t>《共享 KV 多 ASU 多 Path 下的组批错峰与带宽协同调度设计》2026-09-17 · §1 / §4–§6 · 相对 Case ① 的形式化增量的关键变化</a:t>
@@ -7121,7 +7184,7 @@
             <a:r>
               <a:rPr lang="en-US" sz="1100" dirty="0">
                 <a:solidFill>
-                  <a:srgbClr val="5D6F80"/>
+                  <a:srgbClr val="4A5A69"/>
                 </a:solidFill>
               </a:rPr>
               <a:t>联合调度计划（式 9）—— 批 / 实例 / 时刻之外，新增「选路」与「带宽」两层决策</a:t>
@@ -7361,7 +7424,7 @@
             <a:r>
               <a:rPr lang="en-US" sz="1050" b="1" dirty="0">
                 <a:solidFill>
-                  <a:srgbClr val="5D6F80"/>
+                  <a:srgbClr val="4A5A69"/>
                 </a:solidFill>
                 <a:latin typeface="PingFang SC" pitchFamily="34" charset="0"/>
                 <a:ea typeface="PingFang SC" pitchFamily="34" charset="-122"/>
@@ -7383,7 +7446,7 @@
             <a:r>
               <a:rPr lang="en-US" sz="1050" b="1" dirty="0">
                 <a:solidFill>
-                  <a:srgbClr val="5D6F80"/>
+                  <a:srgbClr val="4A5A69"/>
                 </a:solidFill>
                 <a:latin typeface="PingFang SC" pitchFamily="34" charset="0"/>
                 <a:ea typeface="PingFang SC" pitchFamily="34" charset="-122"/>
@@ -7405,7 +7468,7 @@
             <a:r>
               <a:rPr lang="en-US" sz="1050" b="1" dirty="0">
                 <a:solidFill>
-                  <a:srgbClr val="5D6F80"/>
+                  <a:srgbClr val="4A5A69"/>
                 </a:solidFill>
                 <a:latin typeface="PingFang SC" pitchFamily="34" charset="0"/>
                 <a:ea typeface="PingFang SC" pitchFamily="34" charset="-122"/>
@@ -7427,7 +7490,7 @@
             <a:r>
               <a:rPr lang="en-US" sz="1050" b="1" dirty="0">
                 <a:solidFill>
-                  <a:srgbClr val="5D6F80"/>
+                  <a:srgbClr val="4A5A69"/>
                 </a:solidFill>
                 <a:latin typeface="PingFang SC" pitchFamily="34" charset="0"/>
                 <a:ea typeface="PingFang SC" pitchFamily="34" charset="-122"/>
@@ -8424,7 +8487,7 @@
             <a:r>
               <a:rPr lang="en-US" sz="1050" dirty="0">
                 <a:solidFill>
-                  <a:srgbClr val="5D6F80"/>
+                  <a:srgbClr val="4A5A69"/>
                 </a:solidFill>
                 <a:latin typeface="PingFang SC" pitchFamily="34" charset="0"/>
                 <a:ea typeface="PingFang SC" pitchFamily="34" charset="-122"/>
@@ -8519,7 +8582,7 @@
             <a:r>
               <a:rPr lang="en-US" sz="1050" dirty="0">
                 <a:solidFill>
-                  <a:srgbClr val="5D6F80"/>
+                  <a:srgbClr val="4A5A69"/>
                 </a:solidFill>
                 <a:latin typeface="PingFang SC" pitchFamily="34" charset="0"/>
                 <a:ea typeface="PingFang SC" pitchFamily="34" charset="-122"/>
@@ -8614,7 +8677,7 @@
             <a:r>
               <a:rPr lang="en-US" sz="1050" dirty="0">
                 <a:solidFill>
-                  <a:srgbClr val="5D6F80"/>
+                  <a:srgbClr val="4A5A69"/>
                 </a:solidFill>
                 <a:latin typeface="PingFang SC" pitchFamily="34" charset="0"/>
                 <a:ea typeface="PingFang SC" pitchFamily="34" charset="-122"/>
@@ -8709,7 +8772,7 @@
             <a:r>
               <a:rPr lang="en-US" sz="1050" dirty="0">
                 <a:solidFill>
-                  <a:srgbClr val="5D6F80"/>
+                  <a:srgbClr val="4A5A69"/>
                 </a:solidFill>
                 <a:latin typeface="PingFang SC" pitchFamily="34" charset="0"/>
                 <a:ea typeface="PingFang SC" pitchFamily="34" charset="-122"/>
@@ -8807,7 +8870,7 @@
     <p:bg>
       <p:bgPr>
         <a:solidFill>
-          <a:srgbClr val="0F1D2E"/>
+          <a:srgbClr val="FFFFFF"/>
         </a:solidFill>
       </p:bgPr>
     </p:bg>
@@ -8852,7 +8915,7 @@
             <a:r>
               <a:rPr lang="en-US" sz="1100" b="1" spc="250" kern="0" dirty="0">
                 <a:solidFill>
-                  <a:srgbClr val="6FD6C9"/>
+                  <a:srgbClr val="0F766E"/>
                 </a:solidFill>
               </a:rPr>
               <a:t>共享 KV 调度研究 · 形式化分析摘要</a:t>
@@ -8888,7 +8951,7 @@
             <a:r>
               <a:rPr lang="en-US" sz="2500" b="1" dirty="0">
                 <a:solidFill>
-                  <a:srgbClr val="EDF2F7"/>
+                  <a:srgbClr val="16232F"/>
                 </a:solidFill>
               </a:rPr>
               <a:t>④ 机制设计与可解性：分层协同 S1 · P1 · B1</a:t>
@@ -8924,7 +8987,7 @@
             <a:r>
               <a:rPr lang="en-US" sz="1100" dirty="0">
                 <a:solidFill>
-                  <a:srgbClr val="A8BACC"/>
+                  <a:srgbClr val="4A5A69"/>
                 </a:solidFill>
               </a:rPr>
               <a:t>《共享 KV 多 ASU 多 Path 下的组批错峰与带宽协同调度设计》§8–§11 · 表中数字为假设参数的解析算例（非实测）</a:t>
@@ -8950,14 +9013,21 @@
             </a:avLst>
           </a:prstGeom>
           <a:solidFill>
-            <a:srgbClr val="18293E"/>
+            <a:srgbClr val="FFFFFF"/>
           </a:solidFill>
           <a:ln w="9525">
             <a:solidFill>
-              <a:srgbClr val="2B4159"/>
+              <a:srgbClr val="D9E2E9"/>
             </a:solidFill>
             <a:prstDash val="solid"/>
           </a:ln>
+          <a:effectLst>
+            <a:outerShdw sx="100000" sy="100000" kx="0" ky="0" algn="bl" rotWithShape="0" blurRad="88900" dist="25400" dir="5400000">
+              <a:srgbClr val="8AA0B4">
+                <a:alpha val="20000"/>
+              </a:srgbClr>
+            </a:outerShdw>
+          </a:effectLst>
         </p:spPr>
       </p:sp>
       <p:sp>
@@ -8987,7 +9057,7 @@
             <a:r>
               <a:rPr lang="en-US" sz="1200" b="1" dirty="0">
                 <a:solidFill>
-                  <a:srgbClr val="E89B2D"/>
+                  <a:srgbClr val="B45309"/>
                 </a:solidFill>
               </a:rPr>
               <a:t>现状缺陷 ① B0 余量均分 —— 份额 ∝ 活跃 Path 数</a:t>
@@ -9026,7 +9096,7 @@
             <a:r>
               <a:rPr lang="en-US" sz="1150" i="1" dirty="0">
                 <a:solidFill>
-                  <a:srgbClr val="EDF2F7"/>
+                  <a:srgbClr val="16232F"/>
                 </a:solidFill>
                 <a:latin typeface="Times New Roman" pitchFamily="34" charset="0"/>
                 <a:ea typeface="Times New Roman" pitchFamily="34" charset="-122"/>
@@ -9037,7 +9107,7 @@
             <a:r>
               <a:rPr lang="en-US" sz="1150" i="1" baseline="-40000" dirty="0">
                 <a:solidFill>
-                  <a:srgbClr val="EDF2F7"/>
+                  <a:srgbClr val="16232F"/>
                 </a:solidFill>
                 <a:latin typeface="Times New Roman" pitchFamily="34" charset="0"/>
                 <a:ea typeface="Times New Roman" pitchFamily="34" charset="-122"/>
@@ -9048,7 +9118,7 @@
             <a:r>
               <a:rPr lang="en-US" sz="1150" dirty="0">
                 <a:solidFill>
-                  <a:srgbClr val="EDF2F7"/>
+                  <a:srgbClr val="16232F"/>
                 </a:solidFill>
                 <a:latin typeface="Times New Roman" pitchFamily="34" charset="0"/>
                 <a:ea typeface="Times New Roman" pitchFamily="34" charset="-122"/>
@@ -9059,7 +9129,7 @@
             <a:r>
               <a:rPr lang="en-US" sz="1150" i="1" dirty="0">
                 <a:solidFill>
-                  <a:srgbClr val="EDF2F7"/>
+                  <a:srgbClr val="16232F"/>
                 </a:solidFill>
                 <a:latin typeface="Times New Roman" pitchFamily="34" charset="0"/>
                 <a:ea typeface="Times New Roman" pitchFamily="34" charset="-122"/>
@@ -9070,7 +9140,7 @@
             <a:r>
               <a:rPr lang="en-US" sz="1150" i="1" baseline="-40000" dirty="0">
                 <a:solidFill>
-                  <a:srgbClr val="EDF2F7"/>
+                  <a:srgbClr val="16232F"/>
                 </a:solidFill>
                 <a:latin typeface="Times New Roman" pitchFamily="34" charset="0"/>
                 <a:ea typeface="Times New Roman" pitchFamily="34" charset="-122"/>
@@ -9081,7 +9151,7 @@
             <a:r>
               <a:rPr lang="en-US" sz="1150" dirty="0">
                 <a:solidFill>
-                  <a:srgbClr val="EDF2F7"/>
+                  <a:srgbClr val="16232F"/>
                 </a:solidFill>
                 <a:latin typeface="Times New Roman" pitchFamily="34" charset="0"/>
                 <a:ea typeface="Times New Roman" pitchFamily="34" charset="-122"/>
@@ -9092,7 +9162,7 @@
             <a:r>
               <a:rPr lang="en-US" sz="1150" i="1" dirty="0">
                 <a:solidFill>
-                  <a:srgbClr val="EDF2F7"/>
+                  <a:srgbClr val="16232F"/>
                 </a:solidFill>
                 <a:latin typeface="Times New Roman" pitchFamily="34" charset="0"/>
                 <a:ea typeface="Times New Roman" pitchFamily="34" charset="-122"/>
@@ -9103,7 +9173,7 @@
             <a:r>
               <a:rPr lang="en-US" sz="1150" dirty="0">
                 <a:solidFill>
-                  <a:srgbClr val="EDF2F7"/>
+                  <a:srgbClr val="16232F"/>
                 </a:solidFill>
                 <a:latin typeface="Times New Roman" pitchFamily="34" charset="0"/>
                 <a:ea typeface="Times New Roman" pitchFamily="34" charset="-122"/>
@@ -9114,7 +9184,7 @@
             <a:r>
               <a:rPr lang="en-US" sz="1150" i="1" dirty="0">
                 <a:solidFill>
-                  <a:srgbClr val="EDF2F7"/>
+                  <a:srgbClr val="16232F"/>
                 </a:solidFill>
                 <a:latin typeface="Times New Roman" pitchFamily="34" charset="0"/>
                 <a:ea typeface="Times New Roman" pitchFamily="34" charset="-122"/>
@@ -9125,7 +9195,7 @@
             <a:r>
               <a:rPr lang="en-US" sz="1150" i="1" baseline="-40000" dirty="0">
                 <a:solidFill>
-                  <a:srgbClr val="EDF2F7"/>
+                  <a:srgbClr val="16232F"/>
                 </a:solidFill>
                 <a:latin typeface="Times New Roman" pitchFamily="34" charset="0"/>
                 <a:ea typeface="Times New Roman" pitchFamily="34" charset="-122"/>
@@ -9136,7 +9206,7 @@
             <a:r>
               <a:rPr lang="en-US" sz="1050" dirty="0">
                 <a:solidFill>
-                  <a:srgbClr val="A8BACC"/>
+                  <a:srgbClr val="4A5A69"/>
                 </a:solidFill>
                 <a:latin typeface="PingFang SC" pitchFamily="34" charset="0"/>
                 <a:ea typeface="PingFang SC" pitchFamily="34" charset="-122"/>
@@ -9165,14 +9235,21 @@
             </a:avLst>
           </a:prstGeom>
           <a:solidFill>
-            <a:srgbClr val="18293E"/>
+            <a:srgbClr val="FFFFFF"/>
           </a:solidFill>
           <a:ln w="9525">
             <a:solidFill>
-              <a:srgbClr val="2B4159"/>
+              <a:srgbClr val="D9E2E9"/>
             </a:solidFill>
             <a:prstDash val="solid"/>
           </a:ln>
+          <a:effectLst>
+            <a:outerShdw sx="100000" sy="100000" kx="0" ky="0" algn="bl" rotWithShape="0" blurRad="88900" dist="25400" dir="5400000">
+              <a:srgbClr val="8AA0B4">
+                <a:alpha val="20000"/>
+              </a:srgbClr>
+            </a:outerShdw>
+          </a:effectLst>
         </p:spPr>
       </p:sp>
       <p:sp>
@@ -9202,7 +9279,7 @@
             <a:r>
               <a:rPr lang="en-US" sz="1200" b="1" dirty="0">
                 <a:solidFill>
-                  <a:srgbClr val="E89B2D"/>
+                  <a:srgbClr val="B45309"/>
                 </a:solidFill>
               </a:rPr>
               <a:t>现状缺陷 ② P0 最短条数 —— 条数 ≠ 剩余工作量</a:t>
@@ -9241,7 +9318,7 @@
             <a:r>
               <a:rPr lang="en-US" sz="1050" dirty="0">
                 <a:solidFill>
-                  <a:srgbClr val="EDF2F7"/>
+                  <a:srgbClr val="16232F"/>
                 </a:solidFill>
                 <a:latin typeface="PingFang SC" pitchFamily="34" charset="0"/>
                 <a:ea typeface="PingFang SC" pitchFamily="34" charset="-122"/>
@@ -9252,7 +9329,7 @@
             <a:r>
               <a:rPr lang="en-US" sz="1050" b="1" dirty="0">
                 <a:solidFill>
-                  <a:srgbClr val="E89B2D"/>
+                  <a:srgbClr val="B45309"/>
                 </a:solidFill>
                 <a:latin typeface="PingFang SC" pitchFamily="34" charset="0"/>
                 <a:ea typeface="PingFang SC" pitchFamily="34" charset="-122"/>
@@ -9263,7 +9340,7 @@
             <a:r>
               <a:rPr lang="en-US" sz="1050" dirty="0">
                 <a:solidFill>
-                  <a:srgbClr val="A8BACC"/>
+                  <a:srgbClr val="4A5A69"/>
                 </a:solidFill>
                 <a:latin typeface="PingFang SC" pitchFamily="34" charset="0"/>
                 <a:ea typeface="PingFang SC" pitchFamily="34" charset="-122"/>
@@ -9292,14 +9369,21 @@
             </a:avLst>
           </a:prstGeom>
           <a:solidFill>
-            <a:srgbClr val="18293E"/>
+            <a:srgbClr val="FFFFFF"/>
           </a:solidFill>
           <a:ln w="9525">
             <a:solidFill>
-              <a:srgbClr val="2B4159"/>
+              <a:srgbClr val="D9E2E9"/>
             </a:solidFill>
             <a:prstDash val="solid"/>
           </a:ln>
+          <a:effectLst>
+            <a:outerShdw sx="100000" sy="100000" kx="0" ky="0" algn="bl" rotWithShape="0" blurRad="88900" dist="25400" dir="5400000">
+              <a:srgbClr val="8AA0B4">
+                <a:alpha val="20000"/>
+              </a:srgbClr>
+            </a:outerShdw>
+          </a:effectLst>
         </p:spPr>
       </p:sp>
       <p:sp>
@@ -9329,7 +9413,7 @@
             <a:r>
               <a:rPr lang="en-US" sz="1250" b="1" dirty="0">
                 <a:solidFill>
-                  <a:srgbClr val="6FD6C9"/>
+                  <a:srgbClr val="0F766E"/>
                 </a:solidFill>
               </a:rPr>
               <a:t>S1 · 中央调度（§11.7）</a:t>
@@ -9371,7 +9455,7 @@
             <a:r>
               <a:rPr lang="en-US" sz="1050" dirty="0">
                 <a:solidFill>
-                  <a:srgbClr val="EDF2F7"/>
+                  <a:srgbClr val="16232F"/>
                 </a:solidFill>
                 <a:latin typeface="PingFang SC" pitchFamily="34" charset="0"/>
                 <a:ea typeface="PingFang SC" pitchFamily="34" charset="-122"/>
@@ -9394,7 +9478,7 @@
             <a:r>
               <a:rPr lang="en-US" sz="1050" dirty="0">
                 <a:solidFill>
-                  <a:srgbClr val="A8BACC"/>
+                  <a:srgbClr val="4A5A69"/>
                 </a:solidFill>
                 <a:latin typeface="PingFang SC" pitchFamily="34" charset="0"/>
                 <a:ea typeface="PingFang SC" pitchFamily="34" charset="-122"/>
@@ -9423,14 +9507,21 @@
             </a:avLst>
           </a:prstGeom>
           <a:solidFill>
-            <a:srgbClr val="18293E"/>
+            <a:srgbClr val="FFFFFF"/>
           </a:solidFill>
           <a:ln w="9525">
             <a:solidFill>
-              <a:srgbClr val="2B4159"/>
+              <a:srgbClr val="D9E2E9"/>
             </a:solidFill>
             <a:prstDash val="solid"/>
           </a:ln>
+          <a:effectLst>
+            <a:outerShdw sx="100000" sy="100000" kx="0" ky="0" algn="bl" rotWithShape="0" blurRad="88900" dist="25400" dir="5400000">
+              <a:srgbClr val="8AA0B4">
+                <a:alpha val="20000"/>
+              </a:srgbClr>
+            </a:outerShdw>
+          </a:effectLst>
         </p:spPr>
       </p:sp>
       <p:sp>
@@ -9460,7 +9551,7 @@
             <a:r>
               <a:rPr lang="en-US" sz="1250" b="1" dirty="0">
                 <a:solidFill>
-                  <a:srgbClr val="6FD6C9"/>
+                  <a:srgbClr val="0F766E"/>
                 </a:solidFill>
               </a:rPr>
               <a:t>P1 · 智能选路（§11.3）</a:t>
@@ -9496,7 +9587,7 @@
             <a:r>
               <a:rPr lang="en-US" sz="1150" dirty="0">
                 <a:solidFill>
-                  <a:srgbClr val="EDF2F7"/>
+                  <a:srgbClr val="16232F"/>
                 </a:solidFill>
                 <a:latin typeface="Times New Roman" pitchFamily="34" charset="0"/>
                 <a:ea typeface="Times New Roman" pitchFamily="34" charset="-122"/>
@@ -9507,7 +9598,7 @@
             <a:r>
               <a:rPr lang="en-US" sz="1150" i="1" dirty="0">
                 <a:solidFill>
-                  <a:srgbClr val="EDF2F7"/>
+                  <a:srgbClr val="16232F"/>
                 </a:solidFill>
                 <a:latin typeface="Times New Roman" pitchFamily="34" charset="0"/>
                 <a:ea typeface="Times New Roman" pitchFamily="34" charset="-122"/>
@@ -9518,7 +9609,7 @@
             <a:r>
               <a:rPr lang="en-US" sz="1150" i="1" baseline="-40000" dirty="0">
                 <a:solidFill>
-                  <a:srgbClr val="EDF2F7"/>
+                  <a:srgbClr val="16232F"/>
                 </a:solidFill>
                 <a:latin typeface="Times New Roman" pitchFamily="34" charset="0"/>
                 <a:ea typeface="Times New Roman" pitchFamily="34" charset="-122"/>
@@ -9529,7 +9620,7 @@
             <a:r>
               <a:rPr lang="en-US" sz="1150" dirty="0">
                 <a:solidFill>
-                  <a:srgbClr val="EDF2F7"/>
+                  <a:srgbClr val="16232F"/>
                 </a:solidFill>
                 <a:latin typeface="Times New Roman" pitchFamily="34" charset="0"/>
                 <a:ea typeface="Times New Roman" pitchFamily="34" charset="-122"/>
@@ -9540,7 +9631,7 @@
             <a:r>
               <a:rPr lang="en-US" sz="1150" i="1" dirty="0">
                 <a:solidFill>
-                  <a:srgbClr val="EDF2F7"/>
+                  <a:srgbClr val="16232F"/>
                 </a:solidFill>
                 <a:latin typeface="Times New Roman" pitchFamily="34" charset="0"/>
                 <a:ea typeface="Times New Roman" pitchFamily="34" charset="-122"/>
@@ -9551,7 +9642,7 @@
             <a:r>
               <a:rPr lang="en-US" sz="1150" dirty="0">
                 <a:solidFill>
-                  <a:srgbClr val="EDF2F7"/>
+                  <a:srgbClr val="16232F"/>
                 </a:solidFill>
                 <a:latin typeface="Times New Roman" pitchFamily="34" charset="0"/>
                 <a:ea typeface="Times New Roman" pitchFamily="34" charset="-122"/>
@@ -9562,7 +9653,7 @@
             <a:r>
               <a:rPr lang="en-US" sz="1150" i="1" dirty="0">
                 <a:solidFill>
-                  <a:srgbClr val="EDF2F7"/>
+                  <a:srgbClr val="16232F"/>
                 </a:solidFill>
                 <a:latin typeface="Times New Roman" pitchFamily="34" charset="0"/>
                 <a:ea typeface="Times New Roman" pitchFamily="34" charset="-122"/>
@@ -9573,7 +9664,7 @@
             <a:r>
               <a:rPr lang="en-US" sz="1150" dirty="0">
                 <a:solidFill>
-                  <a:srgbClr val="EDF2F7"/>
+                  <a:srgbClr val="16232F"/>
                 </a:solidFill>
                 <a:latin typeface="Times New Roman" pitchFamily="34" charset="0"/>
                 <a:ea typeface="Times New Roman" pitchFamily="34" charset="-122"/>
@@ -9584,7 +9675,7 @@
             <a:r>
               <a:rPr lang="en-US" sz="1150" i="1" dirty="0">
                 <a:solidFill>
-                  <a:srgbClr val="EDF2F7"/>
+                  <a:srgbClr val="16232F"/>
                 </a:solidFill>
                 <a:latin typeface="Times New Roman" pitchFamily="34" charset="0"/>
                 <a:ea typeface="Times New Roman" pitchFamily="34" charset="-122"/>
@@ -9595,7 +9686,7 @@
             <a:r>
               <a:rPr lang="en-US" sz="1150" i="1" baseline="-40000" dirty="0">
                 <a:solidFill>
-                  <a:srgbClr val="EDF2F7"/>
+                  <a:srgbClr val="16232F"/>
                 </a:solidFill>
                 <a:latin typeface="Times New Roman" pitchFamily="34" charset="0"/>
                 <a:ea typeface="Times New Roman" pitchFamily="34" charset="-122"/>
@@ -9606,7 +9697,7 @@
             <a:r>
               <a:rPr lang="en-US" sz="1150" dirty="0">
                 <a:solidFill>
-                  <a:srgbClr val="EDF2F7"/>
+                  <a:srgbClr val="16232F"/>
                 </a:solidFill>
                 <a:latin typeface="Times New Roman" pitchFamily="34" charset="0"/>
                 <a:ea typeface="Times New Roman" pitchFamily="34" charset="-122"/>
@@ -9617,7 +9708,7 @@
             <a:r>
               <a:rPr lang="en-US" sz="1150" i="1" dirty="0">
                 <a:solidFill>
-                  <a:srgbClr val="EDF2F7"/>
+                  <a:srgbClr val="16232F"/>
                 </a:solidFill>
                 <a:latin typeface="Times New Roman" pitchFamily="34" charset="0"/>
                 <a:ea typeface="Times New Roman" pitchFamily="34" charset="-122"/>
@@ -9628,7 +9719,7 @@
             <a:r>
               <a:rPr lang="en-US" sz="1150" i="1" baseline="-40000" dirty="0">
                 <a:solidFill>
-                  <a:srgbClr val="EDF2F7"/>
+                  <a:srgbClr val="16232F"/>
                 </a:solidFill>
                 <a:latin typeface="Times New Roman" pitchFamily="34" charset="0"/>
                 <a:ea typeface="Times New Roman" pitchFamily="34" charset="-122"/>
@@ -9639,7 +9730,7 @@
             <a:r>
               <a:rPr lang="en-US" sz="1150" dirty="0">
                 <a:solidFill>
-                  <a:srgbClr val="EDF2F7"/>
+                  <a:srgbClr val="16232F"/>
                 </a:solidFill>
                 <a:latin typeface="Times New Roman" pitchFamily="34" charset="0"/>
                 <a:ea typeface="Times New Roman" pitchFamily="34" charset="-122"/>
@@ -9650,7 +9741,7 @@
             <a:r>
               <a:rPr lang="en-US" sz="1150" i="1" dirty="0">
                 <a:solidFill>
-                  <a:srgbClr val="EDF2F7"/>
+                  <a:srgbClr val="16232F"/>
                 </a:solidFill>
                 <a:latin typeface="Times New Roman" pitchFamily="34" charset="0"/>
                 <a:ea typeface="Times New Roman" pitchFamily="34" charset="-122"/>
@@ -9661,7 +9752,7 @@
             <a:r>
               <a:rPr lang="en-US" sz="1150" i="1" baseline="-40000" dirty="0">
                 <a:solidFill>
-                  <a:srgbClr val="EDF2F7"/>
+                  <a:srgbClr val="16232F"/>
                 </a:solidFill>
                 <a:latin typeface="Times New Roman" pitchFamily="34" charset="0"/>
                 <a:ea typeface="Times New Roman" pitchFamily="34" charset="-122"/>
@@ -9706,7 +9797,7 @@
             <a:r>
               <a:rPr lang="en-US" sz="1050" dirty="0">
                 <a:solidFill>
-                  <a:srgbClr val="EDF2F7"/>
+                  <a:srgbClr val="16232F"/>
                 </a:solidFill>
                 <a:latin typeface="PingFang SC" pitchFamily="34" charset="0"/>
                 <a:ea typeface="PingFang SC" pitchFamily="34" charset="-122"/>
@@ -9735,14 +9826,21 @@
             </a:avLst>
           </a:prstGeom>
           <a:solidFill>
-            <a:srgbClr val="18293E"/>
+            <a:srgbClr val="FFFFFF"/>
           </a:solidFill>
           <a:ln w="9525">
             <a:solidFill>
-              <a:srgbClr val="2B4159"/>
+              <a:srgbClr val="D9E2E9"/>
             </a:solidFill>
             <a:prstDash val="solid"/>
           </a:ln>
+          <a:effectLst>
+            <a:outerShdw sx="100000" sy="100000" kx="0" ky="0" algn="bl" rotWithShape="0" blurRad="88900" dist="25400" dir="5400000">
+              <a:srgbClr val="8AA0B4">
+                <a:alpha val="20000"/>
+              </a:srgbClr>
+            </a:outerShdw>
+          </a:effectLst>
         </p:spPr>
       </p:sp>
       <p:sp>
@@ -9772,7 +9870,7 @@
             <a:r>
               <a:rPr lang="en-US" sz="1250" b="1" dirty="0">
                 <a:solidFill>
-                  <a:srgbClr val="6FD6C9"/>
+                  <a:srgbClr val="0F766E"/>
                 </a:solidFill>
               </a:rPr>
               <a:t>B1 · 带宽分配（§11.4）</a:t>
@@ -9808,7 +9906,7 @@
             <a:r>
               <a:rPr lang="en-US" sz="1150" i="1" dirty="0">
                 <a:solidFill>
-                  <a:srgbClr val="EDF2F7"/>
+                  <a:srgbClr val="16232F"/>
                 </a:solidFill>
                 <a:latin typeface="Times New Roman" pitchFamily="34" charset="0"/>
                 <a:ea typeface="Times New Roman" pitchFamily="34" charset="-122"/>
@@ -9819,7 +9917,7 @@
             <a:r>
               <a:rPr lang="en-US" sz="1150" i="1" baseline="-40000" dirty="0">
                 <a:solidFill>
-                  <a:srgbClr val="EDF2F7"/>
+                  <a:srgbClr val="16232F"/>
                 </a:solidFill>
                 <a:latin typeface="Times New Roman" pitchFamily="34" charset="0"/>
                 <a:ea typeface="Times New Roman" pitchFamily="34" charset="-122"/>
@@ -9830,7 +9928,7 @@
             <a:r>
               <a:rPr lang="en-US" sz="1150" dirty="0">
                 <a:solidFill>
-                  <a:srgbClr val="EDF2F7"/>
+                  <a:srgbClr val="16232F"/>
                 </a:solidFill>
                 <a:latin typeface="Times New Roman" pitchFamily="34" charset="0"/>
                 <a:ea typeface="Times New Roman" pitchFamily="34" charset="-122"/>
@@ -9841,7 +9939,7 @@
             <a:r>
               <a:rPr lang="en-US" sz="1150" i="1" dirty="0">
                 <a:solidFill>
-                  <a:srgbClr val="EDF2F7"/>
+                  <a:srgbClr val="16232F"/>
                 </a:solidFill>
                 <a:latin typeface="Times New Roman" pitchFamily="34" charset="0"/>
                 <a:ea typeface="Times New Roman" pitchFamily="34" charset="-122"/>
@@ -9852,7 +9950,7 @@
             <a:r>
               <a:rPr lang="en-US" sz="1150" i="1" baseline="-40000" dirty="0">
                 <a:solidFill>
-                  <a:srgbClr val="EDF2F7"/>
+                  <a:srgbClr val="16232F"/>
                 </a:solidFill>
                 <a:latin typeface="Times New Roman" pitchFamily="34" charset="0"/>
                 <a:ea typeface="Times New Roman" pitchFamily="34" charset="-122"/>
@@ -9863,7 +9961,7 @@
             <a:r>
               <a:rPr lang="en-US" sz="1150" dirty="0">
                 <a:solidFill>
-                  <a:srgbClr val="EDF2F7"/>
+                  <a:srgbClr val="16232F"/>
                 </a:solidFill>
                 <a:latin typeface="Times New Roman" pitchFamily="34" charset="0"/>
                 <a:ea typeface="Times New Roman" pitchFamily="34" charset="-122"/>
@@ -9874,7 +9972,7 @@
             <a:r>
               <a:rPr lang="en-US" sz="1150" i="1" dirty="0">
                 <a:solidFill>
-                  <a:srgbClr val="EDF2F7"/>
+                  <a:srgbClr val="16232F"/>
                 </a:solidFill>
                 <a:latin typeface="Times New Roman" pitchFamily="34" charset="0"/>
                 <a:ea typeface="Times New Roman" pitchFamily="34" charset="-122"/>
@@ -9885,7 +9983,7 @@
             <a:r>
               <a:rPr lang="en-US" sz="1150" i="1" baseline="-40000" dirty="0">
                 <a:solidFill>
-                  <a:srgbClr val="EDF2F7"/>
+                  <a:srgbClr val="16232F"/>
                 </a:solidFill>
                 <a:latin typeface="Times New Roman" pitchFamily="34" charset="0"/>
                 <a:ea typeface="Times New Roman" pitchFamily="34" charset="-122"/>
@@ -9896,7 +9994,7 @@
             <a:r>
               <a:rPr lang="en-US" sz="1150" i="1" dirty="0">
                 <a:solidFill>
-                  <a:srgbClr val="EDF2F7"/>
+                  <a:srgbClr val="16232F"/>
                 </a:solidFill>
                 <a:latin typeface="Times New Roman" pitchFamily="34" charset="0"/>
                 <a:ea typeface="Times New Roman" pitchFamily="34" charset="-122"/>
@@ -9907,7 +10005,7 @@
             <a:r>
               <a:rPr lang="en-US" sz="1150" i="1" baseline="-40000" dirty="0">
                 <a:solidFill>
-                  <a:srgbClr val="EDF2F7"/>
+                  <a:srgbClr val="16232F"/>
                 </a:solidFill>
                 <a:latin typeface="Times New Roman" pitchFamily="34" charset="0"/>
                 <a:ea typeface="Times New Roman" pitchFamily="34" charset="-122"/>
@@ -9918,7 +10016,7 @@
             <a:r>
               <a:rPr lang="en-US" sz="1150" dirty="0">
                 <a:solidFill>
-                  <a:srgbClr val="EDF2F7"/>
+                  <a:srgbClr val="16232F"/>
                 </a:solidFill>
                 <a:latin typeface="Times New Roman" pitchFamily="34" charset="0"/>
                 <a:ea typeface="Times New Roman" pitchFamily="34" charset="-122"/>
@@ -9963,7 +10061,7 @@
             <a:r>
               <a:rPr lang="en-US" sz="1050" dirty="0">
                 <a:solidFill>
-                  <a:srgbClr val="EDF2F7"/>
+                  <a:srgbClr val="16232F"/>
                 </a:solidFill>
                 <a:latin typeface="PingFang SC" pitchFamily="34" charset="0"/>
                 <a:ea typeface="PingFang SC" pitchFamily="34" charset="-122"/>
@@ -9992,14 +10090,21 @@
             </a:avLst>
           </a:prstGeom>
           <a:solidFill>
-            <a:srgbClr val="18293E"/>
+            <a:srgbClr val="FFFFFF"/>
           </a:solidFill>
           <a:ln w="9525">
             <a:solidFill>
-              <a:srgbClr val="2B4159"/>
+              <a:srgbClr val="D9E2E9"/>
             </a:solidFill>
             <a:prstDash val="solid"/>
           </a:ln>
+          <a:effectLst>
+            <a:outerShdw sx="100000" sy="100000" kx="0" ky="0" algn="bl" rotWithShape="0" blurRad="88900" dist="25400" dir="5400000">
+              <a:srgbClr val="8AA0B4">
+                <a:alpha val="20000"/>
+              </a:srgbClr>
+            </a:outerShdw>
+          </a:effectLst>
         </p:spPr>
       </p:sp>
       <p:sp>
@@ -10029,7 +10134,7 @@
             <a:r>
               <a:rPr lang="en-US" sz="1200" b="1" dirty="0">
                 <a:solidFill>
-                  <a:srgbClr val="6FD6C9"/>
+                  <a:srgbClr val="0F766E"/>
                 </a:solidFill>
               </a:rPr>
               <a:t>复杂性与三档证书（§9–§10）</a:t>
@@ -10068,7 +10173,7 @@
             <a:r>
               <a:rPr lang="en-US" sz="1050" dirty="0">
                 <a:solidFill>
-                  <a:srgbClr val="EDF2F7"/>
+                  <a:srgbClr val="16232F"/>
                 </a:solidFill>
                 <a:latin typeface="PingFang SC" pitchFamily="34" charset="0"/>
                 <a:ea typeface="PingFang SC" pitchFamily="34" charset="-122"/>
@@ -10079,7 +10184,7 @@
             <a:r>
               <a:rPr lang="en-US" sz="1050" b="1" dirty="0">
                 <a:solidFill>
-                  <a:srgbClr val="EDF2F7"/>
+                  <a:srgbClr val="16232F"/>
                 </a:solidFill>
                 <a:latin typeface="PingFang SC" pitchFamily="34" charset="0"/>
                 <a:ea typeface="PingFang SC" pitchFamily="34" charset="-122"/>
@@ -10090,7 +10195,7 @@
             <a:r>
               <a:rPr lang="en-US" sz="1050" dirty="0">
                 <a:solidFill>
-                  <a:srgbClr val="A8BACC"/>
+                  <a:srgbClr val="4A5A69"/>
                 </a:solidFill>
                 <a:latin typeface="PingFang SC" pitchFamily="34" charset="0"/>
                 <a:ea typeface="PingFang SC" pitchFamily="34" charset="-122"/>
@@ -10119,14 +10224,21 @@
             </a:avLst>
           </a:prstGeom>
           <a:solidFill>
-            <a:srgbClr val="18293E"/>
+            <a:srgbClr val="FFFFFF"/>
           </a:solidFill>
           <a:ln w="9525">
             <a:solidFill>
-              <a:srgbClr val="2B4159"/>
+              <a:srgbClr val="D9E2E9"/>
             </a:solidFill>
             <a:prstDash val="solid"/>
           </a:ln>
+          <a:effectLst>
+            <a:outerShdw sx="100000" sy="100000" kx="0" ky="0" algn="bl" rotWithShape="0" blurRad="88900" dist="25400" dir="5400000">
+              <a:srgbClr val="8AA0B4">
+                <a:alpha val="20000"/>
+              </a:srgbClr>
+            </a:outerShdw>
+          </a:effectLst>
         </p:spPr>
       </p:sp>
       <p:sp>
@@ -10156,7 +10268,7 @@
             <a:r>
               <a:rPr lang="en-US" sz="1200" b="1" dirty="0">
                 <a:solidFill>
-                  <a:srgbClr val="6FD6C9"/>
+                  <a:srgbClr val="0F766E"/>
                 </a:solidFill>
               </a:rPr>
               <a:t>解析边界算例（§8）</a:t>
@@ -10195,7 +10307,7 @@
             <a:r>
               <a:rPr lang="en-US" sz="1050" dirty="0">
                 <a:solidFill>
-                  <a:srgbClr val="EDF2F7"/>
+                  <a:srgbClr val="16232F"/>
                 </a:solidFill>
                 <a:latin typeface="PingFang SC" pitchFamily="34" charset="0"/>
                 <a:ea typeface="PingFang SC" pitchFamily="34" charset="-122"/>
@@ -10206,7 +10318,7 @@
             <a:r>
               <a:rPr lang="en-US" sz="1050" b="1" dirty="0">
                 <a:solidFill>
-                  <a:srgbClr val="E89B2D"/>
+                  <a:srgbClr val="B45309"/>
                 </a:solidFill>
                 <a:latin typeface="PingFang SC" pitchFamily="34" charset="0"/>
                 <a:ea typeface="PingFang SC" pitchFamily="34" charset="-122"/>
@@ -10217,7 +10329,7 @@
             <a:r>
               <a:rPr lang="en-US" sz="1050" dirty="0">
                 <a:solidFill>
-                  <a:srgbClr val="A8BACC"/>
+                  <a:srgbClr val="4A5A69"/>
                 </a:solidFill>
                 <a:latin typeface="PingFang SC" pitchFamily="34" charset="0"/>
                 <a:ea typeface="PingFang SC" pitchFamily="34" charset="-122"/>
@@ -10246,7 +10358,7 @@
             </a:avLst>
           </a:prstGeom>
           <a:solidFill>
-            <a:srgbClr val="2C2413"/>
+            <a:srgbClr val="FBF2E2"/>
           </a:solidFill>
           <a:ln/>
         </p:spPr>
@@ -10278,7 +10390,7 @@
             <a:r>
               <a:rPr lang="en-US" sz="1200" b="1" dirty="0">
                 <a:solidFill>
-                  <a:srgbClr val="F2C069"/>
+                  <a:srgbClr val="8A5A0B"/>
                 </a:solidFill>
               </a:rPr>
               <a:t>统一判决：动作价值 = 对所有被波及请求（他批 · 队列 · 写回）的联合重放增量——条数 / 利用率 / STALL 等局部指标不能替代四目标</a:t>
